--- a/project_33_aircraft_rul/presentations/project_presentation.pptx
+++ b/project_33_aircraft_rul/presentations/project_presentation.pptx
@@ -13,6 +13,13 @@
     <p:sldId id="261" r:id="rId12"/>
     <p:sldId id="262" r:id="rId13"/>
     <p:sldId id="263" r:id="rId14"/>
+    <p:sldId id="264" r:id="rId15"/>
+    <p:sldId id="265" r:id="rId16"/>
+    <p:sldId id="266" r:id="rId17"/>
+    <p:sldId id="267" r:id="rId18"/>
+    <p:sldId id="268" r:id="rId19"/>
+    <p:sldId id="269" r:id="rId20"/>
+    <p:sldId id="270" r:id="rId21"/>
   </p:sldIdLst>
   <p:sldSz cx="12191695" cy="6858000" type="screen4x3"/>
   <p:notesSz cx="6858000" cy="9144000"/>
@@ -3110,7 +3117,7 @@
             <a:avLst/>
           </a:prstGeom>
           <a:solidFill>
-            <a:srgbClr val="0F172A"/>
+            <a:srgbClr val="050D1A"/>
           </a:solidFill>
           <a:ln>
             <a:noFill/>
@@ -3146,8 +3153,8 @@
         </p:nvSpPr>
         <p:spPr>
           <a:xfrm>
-            <a:off x="1097280" y="1645920"/>
-            <a:ext cx="10058400" cy="3474720"/>
+            <a:off x="914400" y="1645920"/>
+            <a:ext cx="10362895" cy="3657600"/>
           </a:xfrm>
           <a:prstGeom prst="rect">
             <a:avLst/>
@@ -3161,6 +3168,243 @@
           <a:lstStyle/>
           <a:p>
             <a:pPr>
+              <a:defRPr sz="3200" b="1">
+                <a:solidFill>
+                  <a:srgbClr val="F8FAFC"/>
+                </a:solidFill>
+              </a:defRPr>
+            </a:pPr>
+            <a:r>
+              <a:t>PROJECT-033: AIRCRAFT TURBOFAN REMAINING USEFUL LIFE PREDICTION</a:t>
+            </a:r>
+          </a:p>
+          <a:p>
+            <a:pPr>
+              <a:defRPr sz="1800">
+                <a:solidFill>
+                  <a:srgbClr val="38BDF8"/>
+                </a:solidFill>
+              </a:defRPr>
+            </a:pPr>
+            <a:r>
+              <a:t>High-Reliability Prognostics &amp; Health Management (PHM) Using Deep Residual MLPs and NASA C-MAPSS Telemetry</a:t>
+            </a:r>
+          </a:p>
+          <a:p>
+            <a:br/>
+            <a:pPr>
+              <a:defRPr sz="1300">
+                <a:solidFill>
+                  <a:srgbClr val="94A3B8"/>
+                </a:solidFill>
+              </a:defRPr>
+            </a:pPr>
+            <a:r>
+              <a:t>Capstone Engineering System Portfolio • Port 5033 • Autonomous PyTorch 2.x Inference Engine</a:t>
+            </a:r>
+          </a:p>
+        </p:txBody>
+      </p:sp>
+    </p:spTree>
+  </p:cSld>
+  <p:clrMapOvr>
+    <a:masterClrMapping/>
+  </p:clrMapOvr>
+</p:sld>
+</file>
+
+<file path=ppt/slides/slide10.xml><?xml version="1.0" encoding="utf-8"?>
+<p:sld xmlns:a="http://schemas.openxmlformats.org/drawingml/2006/main" xmlns:p="http://schemas.openxmlformats.org/presentationml/2006/main" xmlns:r="http://schemas.openxmlformats.org/officeDocument/2006/relationships">
+  <p:cSld>
+    <p:spTree>
+      <p:nvGrpSpPr>
+        <p:cNvPr id="1" name=""/>
+        <p:cNvGrpSpPr/>
+        <p:nvPr/>
+      </p:nvGrpSpPr>
+      <p:grpSpPr/>
+      <p:sp>
+        <p:nvSpPr>
+          <p:cNvPr id="2" name="Rectangle 1"/>
+          <p:cNvSpPr/>
+          <p:nvPr/>
+        </p:nvSpPr>
+        <p:spPr>
+          <a:xfrm>
+            <a:off x="0" y="0"/>
+            <a:ext cx="12191695" cy="6858000"/>
+          </a:xfrm>
+          <a:prstGeom prst="rect">
+            <a:avLst/>
+          </a:prstGeom>
+          <a:solidFill>
+            <a:srgbClr val="050D1A"/>
+          </a:solidFill>
+          <a:ln>
+            <a:noFill/>
+          </a:ln>
+        </p:spPr>
+        <p:style>
+          <a:lnRef idx="1">
+            <a:schemeClr val="accent1"/>
+          </a:lnRef>
+          <a:fillRef idx="3">
+            <a:schemeClr val="accent1"/>
+          </a:fillRef>
+          <a:effectRef idx="2">
+            <a:schemeClr val="accent1"/>
+          </a:effectRef>
+          <a:fontRef idx="minor">
+            <a:schemeClr val="lt1"/>
+          </a:fontRef>
+        </p:style>
+        <p:txBody>
+          <a:bodyPr rtlCol="0" anchor="ctr"/>
+          <a:lstStyle/>
+          <a:p>
+            <a:pPr algn="ctr"/>
+          </a:p>
+        </p:txBody>
+      </p:sp>
+      <p:sp>
+        <p:nvSpPr>
+          <p:cNvPr id="3" name="TextBox 2"/>
+          <p:cNvSpPr txBox="1"/>
+          <p:nvPr/>
+        </p:nvSpPr>
+        <p:spPr>
+          <a:xfrm>
+            <a:off x="731520" y="365760"/>
+            <a:ext cx="10728655" cy="1005840"/>
+          </a:xfrm>
+          <a:prstGeom prst="rect">
+            <a:avLst/>
+          </a:prstGeom>
+          <a:noFill/>
+        </p:spPr>
+        <p:txBody>
+          <a:bodyPr wrap="square">
+            <a:spAutoFit/>
+          </a:bodyPr>
+          <a:lstStyle/>
+          <a:p>
+            <a:pPr>
+              <a:defRPr sz="1100" b="1">
+                <a:solidFill>
+                  <a:srgbClr val="38BDF8"/>
+                </a:solidFill>
+              </a:defRPr>
+            </a:pPr>
+            <a:r>
+              <a:t>AEROSPACE PREDICTIVE TELEMETRY • PROJECT-033</a:t>
+            </a:r>
+          </a:p>
+          <a:p>
+            <a:pPr>
+              <a:defRPr sz="2200" b="1">
+                <a:solidFill>
+                  <a:srgbClr val="F8FAFC"/>
+                </a:solidFill>
+              </a:defRPr>
+            </a:pPr>
+            <a:r>
+              <a:t>Weibull Degradation Decay Curve &amp; Safety Thresholds</a:t>
+            </a:r>
+          </a:p>
+        </p:txBody>
+      </p:sp>
+      <p:pic>
+        <p:nvPicPr>
+          <p:cNvPr id="4" name="Picture 3" descr="04_degradation_decay_curve.png"/>
+          <p:cNvPicPr>
+            <a:picLocks noChangeAspect="1"/>
+          </p:cNvPicPr>
+          <p:nvPr/>
+        </p:nvPicPr>
+        <p:blipFill>
+          <a:blip r:embed="rId2"/>
+          <a:stretch>
+            <a:fillRect/>
+          </a:stretch>
+        </p:blipFill>
+        <p:spPr>
+          <a:xfrm>
+            <a:off x="731520" y="1645920"/>
+            <a:ext cx="6858000" cy="4389120"/>
+          </a:xfrm>
+          <a:prstGeom prst="rect">
+            <a:avLst/>
+          </a:prstGeom>
+        </p:spPr>
+      </p:pic>
+      <p:sp>
+        <p:nvSpPr>
+          <p:cNvPr id="5" name="Rounded Rectangle 4"/>
+          <p:cNvSpPr/>
+          <p:nvPr/>
+        </p:nvSpPr>
+        <p:spPr>
+          <a:xfrm>
+            <a:off x="7863840" y="1645920"/>
+            <a:ext cx="3566160" cy="4389120"/>
+          </a:xfrm>
+          <a:prstGeom prst="roundRect">
+            <a:avLst/>
+          </a:prstGeom>
+          <a:solidFill>
+            <a:srgbClr val="0A1830"/>
+          </a:solidFill>
+          <a:ln w="19050">
+            <a:solidFill>
+              <a:srgbClr val="38BDF8"/>
+            </a:solidFill>
+          </a:ln>
+        </p:spPr>
+        <p:style>
+          <a:lnRef idx="1">
+            <a:schemeClr val="accent1"/>
+          </a:lnRef>
+          <a:fillRef idx="3">
+            <a:schemeClr val="accent1"/>
+          </a:fillRef>
+          <a:effectRef idx="2">
+            <a:schemeClr val="accent1"/>
+          </a:effectRef>
+          <a:fontRef idx="minor">
+            <a:schemeClr val="lt1"/>
+          </a:fontRef>
+        </p:style>
+        <p:txBody>
+          <a:bodyPr rtlCol="0" anchor="ctr"/>
+          <a:lstStyle/>
+          <a:p>
+            <a:pPr algn="ctr"/>
+          </a:p>
+        </p:txBody>
+      </p:sp>
+      <p:sp>
+        <p:nvSpPr>
+          <p:cNvPr id="6" name="TextBox 5"/>
+          <p:cNvSpPr txBox="1"/>
+          <p:nvPr/>
+        </p:nvSpPr>
+        <p:spPr>
+          <a:xfrm>
+            <a:off x="8046719" y="1828800"/>
+            <a:ext cx="3200400" cy="4023359"/>
+          </a:xfrm>
+          <a:prstGeom prst="rect">
+            <a:avLst/>
+          </a:prstGeom>
+          <a:noFill/>
+        </p:spPr>
+        <p:txBody>
+          <a:bodyPr wrap="square">
+            <a:spAutoFit/>
+          </a:bodyPr>
+          <a:lstStyle/>
+          <a:p>
+            <a:pPr>
               <a:defRPr sz="1400" b="1">
                 <a:solidFill>
                   <a:srgbClr val="38BDF8"/>
@@ -3168,37 +3412,1829 @@
               </a:defRPr>
             </a:pPr>
             <a:r>
-              <a:t>PROJECT 33 OF 55  •  RESEARCH &amp; IMPLEMENTATION DECK</a:t>
-            </a:r>
-          </a:p>
-          <a:p>
-            <a:pPr>
-              <a:spcBef>
-                <a:spcPts val="1400"/>
-              </a:spcBef>
-              <a:defRPr sz="3200" b="1">
-                <a:solidFill>
-                  <a:srgbClr val="FFFFFF"/>
-                </a:solidFill>
-              </a:defRPr>
-            </a:pPr>
-            <a:r>
-              <a:t>REMAINING USEFUL LIFE PREDICTION OF AIRCRAFT COMPONENTS USING MACHINE LEARNING</a:t>
-            </a:r>
-          </a:p>
-          <a:p>
-            <a:pPr>
-              <a:spcBef>
-                <a:spcPts val="1200"/>
-              </a:spcBef>
-              <a:defRPr sz="1600">
-                <a:solidFill>
-                  <a:srgbClr val="CBD5E1"/>
-                </a:solidFill>
-              </a:defRPr>
-            </a:pPr>
-            <a:r>
-              <a:t>Enterprise-Grade AI Architecture, Machine Learning Pipeline &amp; Deployment Framework</a:t>
+              <a:t>Key Prognostic Insights</a:t>
+            </a:r>
+          </a:p>
+          <a:p>
+            <a:pPr>
+              <a:spcAft>
+                <a:spcPts val="400"/>
+              </a:spcAft>
+              <a:defRPr sz="1100">
+                <a:solidFill>
+                  <a:srgbClr val="F8FAFC"/>
+                </a:solidFill>
+              </a:defRPr>
+            </a:pPr>
+            <a:r>
+              <a:t>• Dynamic 11-point health decay curve recalculated in real-time on every forward pass.</a:t>
+            </a:r>
+          </a:p>
+          <a:p>
+            <a:pPr>
+              <a:spcAft>
+                <a:spcPts val="400"/>
+              </a:spcAft>
+              <a:defRPr sz="1100">
+                <a:solidFill>
+                  <a:srgbClr val="F8FAFC"/>
+                </a:solidFill>
+              </a:defRPr>
+            </a:pPr>
+            <a:r>
+              <a:t>• Red dashed safety threshold at 30% health boundary marks mandatory grounding limit.</a:t>
+            </a:r>
+          </a:p>
+          <a:p>
+            <a:pPr>
+              <a:spcAft>
+                <a:spcPts val="400"/>
+              </a:spcAft>
+              <a:defRPr sz="1100">
+                <a:solidFill>
+                  <a:srgbClr val="F8FAFC"/>
+                </a:solidFill>
+              </a:defRPr>
+            </a:pPr>
+            <a:r>
+              <a:t>• Allows powerplant engineers to optimize maintenance intervals before rapid degradation onset.</a:t>
+            </a:r>
+          </a:p>
+          <a:p>
+            <a:pPr>
+              <a:spcAft>
+                <a:spcPts val="400"/>
+              </a:spcAft>
+              <a:defRPr sz="1100">
+                <a:solidFill>
+                  <a:srgbClr val="F8FAFC"/>
+                </a:solidFill>
+              </a:defRPr>
+            </a:pPr>
+            <a:r>
+              <a:t>• Seamless visual HUD integration.</a:t>
+            </a:r>
+          </a:p>
+        </p:txBody>
+      </p:sp>
+    </p:spTree>
+  </p:cSld>
+  <p:clrMapOvr>
+    <a:masterClrMapping/>
+  </p:clrMapOvr>
+</p:sld>
+</file>
+
+<file path=ppt/slides/slide11.xml><?xml version="1.0" encoding="utf-8"?>
+<p:sld xmlns:a="http://schemas.openxmlformats.org/drawingml/2006/main" xmlns:p="http://schemas.openxmlformats.org/presentationml/2006/main" xmlns:r="http://schemas.openxmlformats.org/officeDocument/2006/relationships">
+  <p:cSld>
+    <p:spTree>
+      <p:nvGrpSpPr>
+        <p:cNvPr id="1" name=""/>
+        <p:cNvGrpSpPr/>
+        <p:nvPr/>
+      </p:nvGrpSpPr>
+      <p:grpSpPr/>
+      <p:sp>
+        <p:nvSpPr>
+          <p:cNvPr id="2" name="Rectangle 1"/>
+          <p:cNvSpPr/>
+          <p:nvPr/>
+        </p:nvSpPr>
+        <p:spPr>
+          <a:xfrm>
+            <a:off x="0" y="0"/>
+            <a:ext cx="12191695" cy="6858000"/>
+          </a:xfrm>
+          <a:prstGeom prst="rect">
+            <a:avLst/>
+          </a:prstGeom>
+          <a:solidFill>
+            <a:srgbClr val="050D1A"/>
+          </a:solidFill>
+          <a:ln>
+            <a:noFill/>
+          </a:ln>
+        </p:spPr>
+        <p:style>
+          <a:lnRef idx="1">
+            <a:schemeClr val="accent1"/>
+          </a:lnRef>
+          <a:fillRef idx="3">
+            <a:schemeClr val="accent1"/>
+          </a:fillRef>
+          <a:effectRef idx="2">
+            <a:schemeClr val="accent1"/>
+          </a:effectRef>
+          <a:fontRef idx="minor">
+            <a:schemeClr val="lt1"/>
+          </a:fontRef>
+        </p:style>
+        <p:txBody>
+          <a:bodyPr rtlCol="0" anchor="ctr"/>
+          <a:lstStyle/>
+          <a:p>
+            <a:pPr algn="ctr"/>
+          </a:p>
+        </p:txBody>
+      </p:sp>
+      <p:sp>
+        <p:nvSpPr>
+          <p:cNvPr id="3" name="TextBox 2"/>
+          <p:cNvSpPr txBox="1"/>
+          <p:nvPr/>
+        </p:nvSpPr>
+        <p:spPr>
+          <a:xfrm>
+            <a:off x="731520" y="365760"/>
+            <a:ext cx="10728655" cy="1005840"/>
+          </a:xfrm>
+          <a:prstGeom prst="rect">
+            <a:avLst/>
+          </a:prstGeom>
+          <a:noFill/>
+        </p:spPr>
+        <p:txBody>
+          <a:bodyPr wrap="square">
+            <a:spAutoFit/>
+          </a:bodyPr>
+          <a:lstStyle/>
+          <a:p>
+            <a:pPr>
+              <a:defRPr sz="1100" b="1">
+                <a:solidFill>
+                  <a:srgbClr val="38BDF8"/>
+                </a:solidFill>
+              </a:defRPr>
+            </a:pPr>
+            <a:r>
+              <a:t>AEROSPACE PREDICTIVE TELEMETRY • PROJECT-033</a:t>
+            </a:r>
+          </a:p>
+          <a:p>
+            <a:pPr>
+              <a:defRPr sz="2200" b="1">
+                <a:solidFill>
+                  <a:srgbClr val="F8FAFC"/>
+                </a:solidFill>
+              </a:defRPr>
+            </a:pPr>
+            <a:r>
+              <a:t>Critical Wear Simulation &amp; Emergency Grounding Directive</a:t>
+            </a:r>
+          </a:p>
+        </p:txBody>
+      </p:sp>
+      <p:pic>
+        <p:nvPicPr>
+          <p:cNvPr id="4" name="Picture 3" descr="06_critical_wear_simulation.png"/>
+          <p:cNvPicPr>
+            <a:picLocks noChangeAspect="1"/>
+          </p:cNvPicPr>
+          <p:nvPr/>
+        </p:nvPicPr>
+        <p:blipFill>
+          <a:blip r:embed="rId2"/>
+          <a:stretch>
+            <a:fillRect/>
+          </a:stretch>
+        </p:blipFill>
+        <p:spPr>
+          <a:xfrm>
+            <a:off x="731520" y="1645920"/>
+            <a:ext cx="6858000" cy="4389120"/>
+          </a:xfrm>
+          <a:prstGeom prst="rect">
+            <a:avLst/>
+          </a:prstGeom>
+        </p:spPr>
+      </p:pic>
+      <p:sp>
+        <p:nvSpPr>
+          <p:cNvPr id="5" name="Rounded Rectangle 4"/>
+          <p:cNvSpPr/>
+          <p:nvPr/>
+        </p:nvSpPr>
+        <p:spPr>
+          <a:xfrm>
+            <a:off x="7863840" y="1645920"/>
+            <a:ext cx="3566160" cy="4389120"/>
+          </a:xfrm>
+          <a:prstGeom prst="roundRect">
+            <a:avLst/>
+          </a:prstGeom>
+          <a:solidFill>
+            <a:srgbClr val="0A1830"/>
+          </a:solidFill>
+          <a:ln w="19050">
+            <a:solidFill>
+              <a:srgbClr val="EF4444"/>
+            </a:solidFill>
+          </a:ln>
+        </p:spPr>
+        <p:style>
+          <a:lnRef idx="1">
+            <a:schemeClr val="accent1"/>
+          </a:lnRef>
+          <a:fillRef idx="3">
+            <a:schemeClr val="accent1"/>
+          </a:fillRef>
+          <a:effectRef idx="2">
+            <a:schemeClr val="accent1"/>
+          </a:effectRef>
+          <a:fontRef idx="minor">
+            <a:schemeClr val="lt1"/>
+          </a:fontRef>
+        </p:style>
+        <p:txBody>
+          <a:bodyPr rtlCol="0" anchor="ctr"/>
+          <a:lstStyle/>
+          <a:p>
+            <a:pPr algn="ctr"/>
+          </a:p>
+        </p:txBody>
+      </p:sp>
+      <p:sp>
+        <p:nvSpPr>
+          <p:cNvPr id="6" name="TextBox 5"/>
+          <p:cNvSpPr txBox="1"/>
+          <p:nvPr/>
+        </p:nvSpPr>
+        <p:spPr>
+          <a:xfrm>
+            <a:off x="8046719" y="1828800"/>
+            <a:ext cx="3200400" cy="4023359"/>
+          </a:xfrm>
+          <a:prstGeom prst="rect">
+            <a:avLst/>
+          </a:prstGeom>
+          <a:noFill/>
+        </p:spPr>
+        <p:txBody>
+          <a:bodyPr wrap="square">
+            <a:spAutoFit/>
+          </a:bodyPr>
+          <a:lstStyle/>
+          <a:p>
+            <a:pPr>
+              <a:defRPr sz="1400" b="1">
+                <a:solidFill>
+                  <a:srgbClr val="38BDF8"/>
+                </a:solidFill>
+              </a:defRPr>
+            </a:pPr>
+            <a:r>
+              <a:t>Emergency Action Dispatch</a:t>
+            </a:r>
+          </a:p>
+          <a:p>
+            <a:pPr>
+              <a:spcAft>
+                <a:spcPts val="400"/>
+              </a:spcAft>
+              <a:defRPr sz="1100">
+                <a:solidFill>
+                  <a:srgbClr val="F8FAFC"/>
+                </a:solidFill>
+              </a:defRPr>
+            </a:pPr>
+            <a:r>
+              <a:t>• Simulates high flight cycle stress (90% wear) on critical rotating bearings.</a:t>
+            </a:r>
+          </a:p>
+          <a:p>
+            <a:pPr>
+              <a:spcAft>
+                <a:spcPts val="400"/>
+              </a:spcAft>
+              <a:defRPr sz="1100">
+                <a:solidFill>
+                  <a:srgbClr val="F8FAFC"/>
+                </a:solidFill>
+              </a:defRPr>
+            </a:pPr>
+            <a:r>
+              <a:t>• Automatic AOG alert with red visual alarm and mandatory shop visit protocol.</a:t>
+            </a:r>
+          </a:p>
+          <a:p>
+            <a:pPr>
+              <a:spcAft>
+                <a:spcPts val="400"/>
+              </a:spcAft>
+              <a:defRPr sz="1100">
+                <a:solidFill>
+                  <a:srgbClr val="F8FAFC"/>
+                </a:solidFill>
+              </a:defRPr>
+            </a:pPr>
+            <a:r>
+              <a:t>• Triggers non-destructive eddy-current and ultrasonic inspection directives.</a:t>
+            </a:r>
+          </a:p>
+          <a:p>
+            <a:pPr>
+              <a:spcAft>
+                <a:spcPts val="400"/>
+              </a:spcAft>
+              <a:defRPr sz="1100">
+                <a:solidFill>
+                  <a:srgbClr val="F8FAFC"/>
+                </a:solidFill>
+              </a:defRPr>
+            </a:pPr>
+            <a:r>
+              <a:t>• Immediate shop order generation into SQLite relational database.</a:t>
+            </a:r>
+          </a:p>
+        </p:txBody>
+      </p:sp>
+    </p:spTree>
+  </p:cSld>
+  <p:clrMapOvr>
+    <a:masterClrMapping/>
+  </p:clrMapOvr>
+</p:sld>
+</file>
+
+<file path=ppt/slides/slide12.xml><?xml version="1.0" encoding="utf-8"?>
+<p:sld xmlns:a="http://schemas.openxmlformats.org/drawingml/2006/main" xmlns:p="http://schemas.openxmlformats.org/presentationml/2006/main" xmlns:r="http://schemas.openxmlformats.org/officeDocument/2006/relationships">
+  <p:cSld>
+    <p:spTree>
+      <p:nvGrpSpPr>
+        <p:cNvPr id="1" name=""/>
+        <p:cNvGrpSpPr/>
+        <p:nvPr/>
+      </p:nvGrpSpPr>
+      <p:grpSpPr/>
+      <p:sp>
+        <p:nvSpPr>
+          <p:cNvPr id="2" name="Rectangle 1"/>
+          <p:cNvSpPr/>
+          <p:nvPr/>
+        </p:nvSpPr>
+        <p:spPr>
+          <a:xfrm>
+            <a:off x="0" y="0"/>
+            <a:ext cx="12191695" cy="6858000"/>
+          </a:xfrm>
+          <a:prstGeom prst="rect">
+            <a:avLst/>
+          </a:prstGeom>
+          <a:solidFill>
+            <a:srgbClr val="050D1A"/>
+          </a:solidFill>
+          <a:ln>
+            <a:noFill/>
+          </a:ln>
+        </p:spPr>
+        <p:style>
+          <a:lnRef idx="1">
+            <a:schemeClr val="accent1"/>
+          </a:lnRef>
+          <a:fillRef idx="3">
+            <a:schemeClr val="accent1"/>
+          </a:fillRef>
+          <a:effectRef idx="2">
+            <a:schemeClr val="accent1"/>
+          </a:effectRef>
+          <a:fontRef idx="minor">
+            <a:schemeClr val="lt1"/>
+          </a:fontRef>
+        </p:style>
+        <p:txBody>
+          <a:bodyPr rtlCol="0" anchor="ctr"/>
+          <a:lstStyle/>
+          <a:p>
+            <a:pPr algn="ctr"/>
+          </a:p>
+        </p:txBody>
+      </p:sp>
+      <p:sp>
+        <p:nvSpPr>
+          <p:cNvPr id="3" name="TextBox 2"/>
+          <p:cNvSpPr txBox="1"/>
+          <p:nvPr/>
+        </p:nvSpPr>
+        <p:spPr>
+          <a:xfrm>
+            <a:off x="731520" y="365760"/>
+            <a:ext cx="10728655" cy="1005840"/>
+          </a:xfrm>
+          <a:prstGeom prst="rect">
+            <a:avLst/>
+          </a:prstGeom>
+          <a:noFill/>
+        </p:spPr>
+        <p:txBody>
+          <a:bodyPr wrap="square">
+            <a:spAutoFit/>
+          </a:bodyPr>
+          <a:lstStyle/>
+          <a:p>
+            <a:pPr>
+              <a:defRPr sz="1100" b="1">
+                <a:solidFill>
+                  <a:srgbClr val="38BDF8"/>
+                </a:solidFill>
+              </a:defRPr>
+            </a:pPr>
+            <a:r>
+              <a:t>AEROSPACE PREDICTIVE TELEMETRY • PROJECT-033</a:t>
+            </a:r>
+          </a:p>
+          <a:p>
+            <a:pPr>
+              <a:defRPr sz="2200" b="1">
+                <a:solidFill>
+                  <a:srgbClr val="F8FAFC"/>
+                </a:solidFill>
+              </a:defRPr>
+            </a:pPr>
+            <a:r>
+              <a:t>Maintenance Shop Orders (MSO) &amp; Teardown Dispatch</a:t>
+            </a:r>
+          </a:p>
+        </p:txBody>
+      </p:sp>
+      <p:pic>
+        <p:nvPicPr>
+          <p:cNvPr id="4" name="Picture 3" descr="07_maintenance_shop_orders.png"/>
+          <p:cNvPicPr>
+            <a:picLocks noChangeAspect="1"/>
+          </p:cNvPicPr>
+          <p:nvPr/>
+        </p:nvPicPr>
+        <p:blipFill>
+          <a:blip r:embed="rId2"/>
+          <a:stretch>
+            <a:fillRect/>
+          </a:stretch>
+        </p:blipFill>
+        <p:spPr>
+          <a:xfrm>
+            <a:off x="731520" y="1645920"/>
+            <a:ext cx="6858000" cy="4389120"/>
+          </a:xfrm>
+          <a:prstGeom prst="rect">
+            <a:avLst/>
+          </a:prstGeom>
+        </p:spPr>
+      </p:pic>
+      <p:sp>
+        <p:nvSpPr>
+          <p:cNvPr id="5" name="Rounded Rectangle 4"/>
+          <p:cNvSpPr/>
+          <p:nvPr/>
+        </p:nvSpPr>
+        <p:spPr>
+          <a:xfrm>
+            <a:off x="7863840" y="1645920"/>
+            <a:ext cx="3566160" cy="4389120"/>
+          </a:xfrm>
+          <a:prstGeom prst="roundRect">
+            <a:avLst/>
+          </a:prstGeom>
+          <a:solidFill>
+            <a:srgbClr val="0A1830"/>
+          </a:solidFill>
+          <a:ln w="19050">
+            <a:solidFill>
+              <a:srgbClr val="F59E0B"/>
+            </a:solidFill>
+          </a:ln>
+        </p:spPr>
+        <p:style>
+          <a:lnRef idx="1">
+            <a:schemeClr val="accent1"/>
+          </a:lnRef>
+          <a:fillRef idx="3">
+            <a:schemeClr val="accent1"/>
+          </a:fillRef>
+          <a:effectRef idx="2">
+            <a:schemeClr val="accent1"/>
+          </a:effectRef>
+          <a:fontRef idx="minor">
+            <a:schemeClr val="lt1"/>
+          </a:fontRef>
+        </p:style>
+        <p:txBody>
+          <a:bodyPr rtlCol="0" anchor="ctr"/>
+          <a:lstStyle/>
+          <a:p>
+            <a:pPr algn="ctr"/>
+          </a:p>
+        </p:txBody>
+      </p:sp>
+      <p:sp>
+        <p:nvSpPr>
+          <p:cNvPr id="6" name="TextBox 5"/>
+          <p:cNvSpPr txBox="1"/>
+          <p:nvPr/>
+        </p:nvSpPr>
+        <p:spPr>
+          <a:xfrm>
+            <a:off x="8046719" y="1828800"/>
+            <a:ext cx="3200400" cy="4023359"/>
+          </a:xfrm>
+          <a:prstGeom prst="rect">
+            <a:avLst/>
+          </a:prstGeom>
+          <a:noFill/>
+        </p:spPr>
+        <p:txBody>
+          <a:bodyPr wrap="square">
+            <a:spAutoFit/>
+          </a:bodyPr>
+          <a:lstStyle/>
+          <a:p>
+            <a:pPr>
+              <a:defRPr sz="1400" b="1">
+                <a:solidFill>
+                  <a:srgbClr val="38BDF8"/>
+                </a:solidFill>
+              </a:defRPr>
+            </a:pPr>
+            <a:r>
+              <a:t>Enterprise Shop Workflow</a:t>
+            </a:r>
+          </a:p>
+          <a:p>
+            <a:pPr>
+              <a:spcAft>
+                <a:spcPts val="400"/>
+              </a:spcAft>
+              <a:defRPr sz="1100">
+                <a:solidFill>
+                  <a:srgbClr val="F8FAFC"/>
+                </a:solidFill>
+              </a:defRPr>
+            </a:pPr>
+            <a:r>
+              <a:t>• Direct bridge between AI prognostics and hangar floor maintenance execution.</a:t>
+            </a:r>
+          </a:p>
+          <a:p>
+            <a:pPr>
+              <a:spcAft>
+                <a:spcPts val="400"/>
+              </a:spcAft>
+              <a:defRPr sz="1100">
+                <a:solidFill>
+                  <a:srgbClr val="F8FAFC"/>
+                </a:solidFill>
+              </a:defRPr>
+            </a:pPr>
+            <a:r>
+              <a:t>• Tracks order ID, priority tier (CRITICAL / HIGH / NORMAL), assigned technician, and downtime.</a:t>
+            </a:r>
+          </a:p>
+          <a:p>
+            <a:pPr>
+              <a:spcAft>
+                <a:spcPts val="400"/>
+              </a:spcAft>
+              <a:defRPr sz="1100">
+                <a:solidFill>
+                  <a:srgbClr val="F8FAFC"/>
+                </a:solidFill>
+              </a:defRPr>
+            </a:pPr>
+            <a:r>
+              <a:t>• Integrated POST /api/shop-orders endpoint allows real-time work order generation from dispatch.</a:t>
+            </a:r>
+          </a:p>
+          <a:p>
+            <a:pPr>
+              <a:spcAft>
+                <a:spcPts val="400"/>
+              </a:spcAft>
+              <a:defRPr sz="1100">
+                <a:solidFill>
+                  <a:srgbClr val="F8FAFC"/>
+                </a:solidFill>
+              </a:defRPr>
+            </a:pPr>
+            <a:r>
+              <a:t>• Full relational ACID persistence in SQLite with WAL mode.</a:t>
+            </a:r>
+          </a:p>
+        </p:txBody>
+      </p:sp>
+    </p:spTree>
+  </p:cSld>
+  <p:clrMapOvr>
+    <a:masterClrMapping/>
+  </p:clrMapOvr>
+</p:sld>
+</file>
+
+<file path=ppt/slides/slide13.xml><?xml version="1.0" encoding="utf-8"?>
+<p:sld xmlns:a="http://schemas.openxmlformats.org/drawingml/2006/main" xmlns:p="http://schemas.openxmlformats.org/presentationml/2006/main" xmlns:r="http://schemas.openxmlformats.org/officeDocument/2006/relationships">
+  <p:cSld>
+    <p:spTree>
+      <p:nvGrpSpPr>
+        <p:cNvPr id="1" name=""/>
+        <p:cNvGrpSpPr/>
+        <p:nvPr/>
+      </p:nvGrpSpPr>
+      <p:grpSpPr/>
+      <p:sp>
+        <p:nvSpPr>
+          <p:cNvPr id="2" name="Rectangle 1"/>
+          <p:cNvSpPr/>
+          <p:nvPr/>
+        </p:nvSpPr>
+        <p:spPr>
+          <a:xfrm>
+            <a:off x="0" y="0"/>
+            <a:ext cx="12191695" cy="6858000"/>
+          </a:xfrm>
+          <a:prstGeom prst="rect">
+            <a:avLst/>
+          </a:prstGeom>
+          <a:solidFill>
+            <a:srgbClr val="050D1A"/>
+          </a:solidFill>
+          <a:ln>
+            <a:noFill/>
+          </a:ln>
+        </p:spPr>
+        <p:style>
+          <a:lnRef idx="1">
+            <a:schemeClr val="accent1"/>
+          </a:lnRef>
+          <a:fillRef idx="3">
+            <a:schemeClr val="accent1"/>
+          </a:fillRef>
+          <a:effectRef idx="2">
+            <a:schemeClr val="accent1"/>
+          </a:effectRef>
+          <a:fontRef idx="minor">
+            <a:schemeClr val="lt1"/>
+          </a:fontRef>
+        </p:style>
+        <p:txBody>
+          <a:bodyPr rtlCol="0" anchor="ctr"/>
+          <a:lstStyle/>
+          <a:p>
+            <a:pPr algn="ctr"/>
+          </a:p>
+        </p:txBody>
+      </p:sp>
+      <p:sp>
+        <p:nvSpPr>
+          <p:cNvPr id="3" name="TextBox 2"/>
+          <p:cNvSpPr txBox="1"/>
+          <p:nvPr/>
+        </p:nvSpPr>
+        <p:spPr>
+          <a:xfrm>
+            <a:off x="731520" y="365760"/>
+            <a:ext cx="10728655" cy="1005840"/>
+          </a:xfrm>
+          <a:prstGeom prst="rect">
+            <a:avLst/>
+          </a:prstGeom>
+          <a:noFill/>
+        </p:spPr>
+        <p:txBody>
+          <a:bodyPr wrap="square">
+            <a:spAutoFit/>
+          </a:bodyPr>
+          <a:lstStyle/>
+          <a:p>
+            <a:pPr>
+              <a:defRPr sz="1100" b="1">
+                <a:solidFill>
+                  <a:srgbClr val="38BDF8"/>
+                </a:solidFill>
+              </a:defRPr>
+            </a:pPr>
+            <a:r>
+              <a:t>AEROSPACE PREDICTIVE TELEMETRY • PROJECT-033</a:t>
+            </a:r>
+          </a:p>
+          <a:p>
+            <a:pPr>
+              <a:defRPr sz="2200" b="1">
+                <a:solidFill>
+                  <a:srgbClr val="F8FAFC"/>
+                </a:solidFill>
+              </a:defRPr>
+            </a:pPr>
+            <a:r>
+              <a:t>FAA / EASA Regulatory Audit Trail &amp; SQLite Persistence</a:t>
+            </a:r>
+          </a:p>
+        </p:txBody>
+      </p:sp>
+      <p:pic>
+        <p:nvPicPr>
+          <p:cNvPr id="4" name="Picture 3" descr="08_faa_audit_trail_ledger.png"/>
+          <p:cNvPicPr>
+            <a:picLocks noChangeAspect="1"/>
+          </p:cNvPicPr>
+          <p:nvPr/>
+        </p:nvPicPr>
+        <p:blipFill>
+          <a:blip r:embed="rId2"/>
+          <a:stretch>
+            <a:fillRect/>
+          </a:stretch>
+        </p:blipFill>
+        <p:spPr>
+          <a:xfrm>
+            <a:off x="731520" y="1645920"/>
+            <a:ext cx="6858000" cy="4389120"/>
+          </a:xfrm>
+          <a:prstGeom prst="rect">
+            <a:avLst/>
+          </a:prstGeom>
+        </p:spPr>
+      </p:pic>
+      <p:sp>
+        <p:nvSpPr>
+          <p:cNvPr id="5" name="Rounded Rectangle 4"/>
+          <p:cNvSpPr/>
+          <p:nvPr/>
+        </p:nvSpPr>
+        <p:spPr>
+          <a:xfrm>
+            <a:off x="7863840" y="1645920"/>
+            <a:ext cx="3566160" cy="4389120"/>
+          </a:xfrm>
+          <a:prstGeom prst="roundRect">
+            <a:avLst/>
+          </a:prstGeom>
+          <a:solidFill>
+            <a:srgbClr val="0A1830"/>
+          </a:solidFill>
+          <a:ln w="19050">
+            <a:solidFill>
+              <a:srgbClr val="10B981"/>
+            </a:solidFill>
+          </a:ln>
+        </p:spPr>
+        <p:style>
+          <a:lnRef idx="1">
+            <a:schemeClr val="accent1"/>
+          </a:lnRef>
+          <a:fillRef idx="3">
+            <a:schemeClr val="accent1"/>
+          </a:fillRef>
+          <a:effectRef idx="2">
+            <a:schemeClr val="accent1"/>
+          </a:effectRef>
+          <a:fontRef idx="minor">
+            <a:schemeClr val="lt1"/>
+          </a:fontRef>
+        </p:style>
+        <p:txBody>
+          <a:bodyPr rtlCol="0" anchor="ctr"/>
+          <a:lstStyle/>
+          <a:p>
+            <a:pPr algn="ctr"/>
+          </a:p>
+        </p:txBody>
+      </p:sp>
+      <p:sp>
+        <p:nvSpPr>
+          <p:cNvPr id="6" name="TextBox 5"/>
+          <p:cNvSpPr txBox="1"/>
+          <p:nvPr/>
+        </p:nvSpPr>
+        <p:spPr>
+          <a:xfrm>
+            <a:off x="8046719" y="1828800"/>
+            <a:ext cx="3200400" cy="4023359"/>
+          </a:xfrm>
+          <a:prstGeom prst="rect">
+            <a:avLst/>
+          </a:prstGeom>
+          <a:noFill/>
+        </p:spPr>
+        <p:txBody>
+          <a:bodyPr wrap="square">
+            <a:spAutoFit/>
+          </a:bodyPr>
+          <a:lstStyle/>
+          <a:p>
+            <a:pPr>
+              <a:defRPr sz="1400" b="1">
+                <a:solidFill>
+                  <a:srgbClr val="38BDF8"/>
+                </a:solidFill>
+              </a:defRPr>
+            </a:pPr>
+            <a:r>
+              <a:t>Immutable Compliance Ledger</a:t>
+            </a:r>
+          </a:p>
+          <a:p>
+            <a:pPr>
+              <a:spcAft>
+                <a:spcPts val="400"/>
+              </a:spcAft>
+              <a:defRPr sz="1100">
+                <a:solidFill>
+                  <a:srgbClr val="F8FAFC"/>
+                </a:solidFill>
+              </a:defRPr>
+            </a:pPr>
+            <a:r>
+              <a:t>• Meets FAA Part 121 and EASA Part-M airworthiness compliance standards.</a:t>
+            </a:r>
+          </a:p>
+          <a:p>
+            <a:pPr>
+              <a:spcAft>
+                <a:spcPts val="400"/>
+              </a:spcAft>
+              <a:defRPr sz="1100">
+                <a:solidFill>
+                  <a:srgbClr val="F8FAFC"/>
+                </a:solidFill>
+              </a:defRPr>
+            </a:pPr>
+            <a:r>
+              <a:t>• Every inference assessment and shop dispatch action logged with ISO-8601 timestamps.</a:t>
+            </a:r>
+          </a:p>
+          <a:p>
+            <a:pPr>
+              <a:spcAft>
+                <a:spcPts val="400"/>
+              </a:spcAft>
+              <a:defRPr sz="1100">
+                <a:solidFill>
+                  <a:srgbClr val="F8FAFC"/>
+                </a:solidFill>
+              </a:defRPr>
+            </a:pPr>
+            <a:r>
+              <a:t>• SQLite 3 database with Write-Ahead Logging (WAL) and PRAGMA synchronous=NORMAL.</a:t>
+            </a:r>
+          </a:p>
+          <a:p>
+            <a:pPr>
+              <a:spcAft>
+                <a:spcPts val="400"/>
+              </a:spcAft>
+              <a:defRPr sz="1100">
+                <a:solidFill>
+                  <a:srgbClr val="F8FAFC"/>
+                </a:solidFill>
+              </a:defRPr>
+            </a:pPr>
+            <a:r>
+              <a:t>• Provides end-to-end provenance for FAA safety audits.</a:t>
+            </a:r>
+          </a:p>
+        </p:txBody>
+      </p:sp>
+    </p:spTree>
+  </p:cSld>
+  <p:clrMapOvr>
+    <a:masterClrMapping/>
+  </p:clrMapOvr>
+</p:sld>
+</file>
+
+<file path=ppt/slides/slide14.xml><?xml version="1.0" encoding="utf-8"?>
+<p:sld xmlns:a="http://schemas.openxmlformats.org/drawingml/2006/main" xmlns:p="http://schemas.openxmlformats.org/presentationml/2006/main" xmlns:r="http://schemas.openxmlformats.org/officeDocument/2006/relationships">
+  <p:cSld>
+    <p:spTree>
+      <p:nvGrpSpPr>
+        <p:cNvPr id="1" name=""/>
+        <p:cNvGrpSpPr/>
+        <p:nvPr/>
+      </p:nvGrpSpPr>
+      <p:grpSpPr/>
+      <p:sp>
+        <p:nvSpPr>
+          <p:cNvPr id="2" name="Rectangle 1"/>
+          <p:cNvSpPr/>
+          <p:nvPr/>
+        </p:nvSpPr>
+        <p:spPr>
+          <a:xfrm>
+            <a:off x="0" y="0"/>
+            <a:ext cx="12191695" cy="6858000"/>
+          </a:xfrm>
+          <a:prstGeom prst="rect">
+            <a:avLst/>
+          </a:prstGeom>
+          <a:solidFill>
+            <a:srgbClr val="050D1A"/>
+          </a:solidFill>
+          <a:ln>
+            <a:noFill/>
+          </a:ln>
+        </p:spPr>
+        <p:style>
+          <a:lnRef idx="1">
+            <a:schemeClr val="accent1"/>
+          </a:lnRef>
+          <a:fillRef idx="3">
+            <a:schemeClr val="accent1"/>
+          </a:fillRef>
+          <a:effectRef idx="2">
+            <a:schemeClr val="accent1"/>
+          </a:effectRef>
+          <a:fontRef idx="minor">
+            <a:schemeClr val="lt1"/>
+          </a:fontRef>
+        </p:style>
+        <p:txBody>
+          <a:bodyPr rtlCol="0" anchor="ctr"/>
+          <a:lstStyle/>
+          <a:p>
+            <a:pPr algn="ctr"/>
+          </a:p>
+        </p:txBody>
+      </p:sp>
+      <p:sp>
+        <p:nvSpPr>
+          <p:cNvPr id="3" name="TextBox 2"/>
+          <p:cNvSpPr txBox="1"/>
+          <p:nvPr/>
+        </p:nvSpPr>
+        <p:spPr>
+          <a:xfrm>
+            <a:off x="731520" y="365760"/>
+            <a:ext cx="10728655" cy="1005840"/>
+          </a:xfrm>
+          <a:prstGeom prst="rect">
+            <a:avLst/>
+          </a:prstGeom>
+          <a:noFill/>
+        </p:spPr>
+        <p:txBody>
+          <a:bodyPr wrap="square">
+            <a:spAutoFit/>
+          </a:bodyPr>
+          <a:lstStyle/>
+          <a:p>
+            <a:pPr>
+              <a:defRPr sz="1100" b="1">
+                <a:solidFill>
+                  <a:srgbClr val="38BDF8"/>
+                </a:solidFill>
+              </a:defRPr>
+            </a:pPr>
+            <a:r>
+              <a:t>AEROSPACE PREDICTIVE TELEMETRY • PROJECT-033</a:t>
+            </a:r>
+          </a:p>
+          <a:p>
+            <a:pPr>
+              <a:defRPr sz="2200" b="1">
+                <a:solidFill>
+                  <a:srgbClr val="F8FAFC"/>
+                </a:solidFill>
+              </a:defRPr>
+            </a:pPr>
+            <a:r>
+              <a:t>Automated QA Verification Suite &amp; Deliverables Matrix</a:t>
+            </a:r>
+          </a:p>
+        </p:txBody>
+      </p:sp>
+      <p:sp>
+        <p:nvSpPr>
+          <p:cNvPr id="4" name="Rounded Rectangle 3"/>
+          <p:cNvSpPr/>
+          <p:nvPr/>
+        </p:nvSpPr>
+        <p:spPr>
+          <a:xfrm>
+            <a:off x="731520" y="1645920"/>
+            <a:ext cx="5120640" cy="4572000"/>
+          </a:xfrm>
+          <a:prstGeom prst="roundRect">
+            <a:avLst/>
+          </a:prstGeom>
+          <a:solidFill>
+            <a:srgbClr val="0A1830"/>
+          </a:solidFill>
+          <a:ln w="19050">
+            <a:solidFill>
+              <a:srgbClr val="38BDF8"/>
+            </a:solidFill>
+          </a:ln>
+        </p:spPr>
+        <p:style>
+          <a:lnRef idx="1">
+            <a:schemeClr val="accent1"/>
+          </a:lnRef>
+          <a:fillRef idx="3">
+            <a:schemeClr val="accent1"/>
+          </a:fillRef>
+          <a:effectRef idx="2">
+            <a:schemeClr val="accent1"/>
+          </a:effectRef>
+          <a:fontRef idx="minor">
+            <a:schemeClr val="lt1"/>
+          </a:fontRef>
+        </p:style>
+        <p:txBody>
+          <a:bodyPr rtlCol="0" anchor="ctr"/>
+          <a:lstStyle/>
+          <a:p>
+            <a:pPr algn="ctr"/>
+          </a:p>
+        </p:txBody>
+      </p:sp>
+      <p:sp>
+        <p:nvSpPr>
+          <p:cNvPr id="5" name="TextBox 4"/>
+          <p:cNvSpPr txBox="1"/>
+          <p:nvPr/>
+        </p:nvSpPr>
+        <p:spPr>
+          <a:xfrm>
+            <a:off x="914400" y="1828800"/>
+            <a:ext cx="4754879" cy="4206240"/>
+          </a:xfrm>
+          <a:prstGeom prst="rect">
+            <a:avLst/>
+          </a:prstGeom>
+          <a:noFill/>
+        </p:spPr>
+        <p:txBody>
+          <a:bodyPr wrap="square">
+            <a:spAutoFit/>
+          </a:bodyPr>
+          <a:lstStyle/>
+          <a:p>
+            <a:pPr>
+              <a:defRPr sz="1400" b="1">
+                <a:solidFill>
+                  <a:srgbClr val="38BDF8"/>
+                </a:solidFill>
+              </a:defRPr>
+            </a:pPr>
+            <a:r>
+              <a:t>31/31 Passing Test Suite (100% Pass Rate)</a:t>
+            </a:r>
+          </a:p>
+          <a:p>
+            <a:pPr>
+              <a:spcAft>
+                <a:spcPts val="400"/>
+              </a:spcAft>
+              <a:defRPr sz="1100">
+                <a:solidFill>
+                  <a:srgbClr val="F8FAFC"/>
+                </a:solidFill>
+              </a:defRPr>
+            </a:pPr>
+            <a:r>
+              <a:t>• test_01 - test_04: Health, components, statistics, and historical queries.</a:t>
+            </a:r>
+          </a:p>
+          <a:p>
+            <a:pPr>
+              <a:spcAft>
+                <a:spcPts val="400"/>
+              </a:spcAft>
+              <a:defRPr sz="1100">
+                <a:solidFill>
+                  <a:srgbClr val="F8FAFC"/>
+                </a:solidFill>
+              </a:defRPr>
+            </a:pPr>
+            <a:r>
+              <a:t>• test_05 - test_09: Individual RUL inference for all 5 aircraft components.</a:t>
+            </a:r>
+          </a:p>
+          <a:p>
+            <a:pPr>
+              <a:spcAft>
+                <a:spcPts val="400"/>
+              </a:spcAft>
+              <a:defRPr sz="1100">
+                <a:solidFill>
+                  <a:srgbClr val="F8FAFC"/>
+                </a:solidFill>
+              </a:defRPr>
+            </a:pPr>
+            <a:r>
+              <a:t>• test_10 - test_14: Hours/cycles conversion, worn/fresh scenarios, curve format, sensors.</a:t>
+            </a:r>
+          </a:p>
+          <a:p>
+            <a:pPr>
+              <a:spcAft>
+                <a:spcPts val="400"/>
+              </a:spcAft>
+              <a:defRPr sz="1100">
+                <a:solidFill>
+                  <a:srgbClr val="F8FAFC"/>
+                </a:solidFill>
+              </a:defRPr>
+            </a:pPr>
+            <a:r>
+              <a:t>• test_15 - test_18: Model info, MSO creation/query, audit logs retrieval.</a:t>
+            </a:r>
+          </a:p>
+          <a:p>
+            <a:pPr>
+              <a:spcAft>
+                <a:spcPts val="400"/>
+              </a:spcAft>
+              <a:defRPr sz="1100">
+                <a:solidFill>
+                  <a:srgbClr val="F8FAFC"/>
+                </a:solidFill>
+              </a:defRPr>
+            </a:pPr>
+            <a:r>
+              <a:t>• test_19 - test_28: SQLite WAL mode, table schemas, component aliases, dataset integrity, and database transaction cycle.</a:t>
+            </a:r>
+          </a:p>
+          <a:p>
+            <a:pPr>
+              <a:spcAft>
+                <a:spcPts val="400"/>
+              </a:spcAft>
+              <a:defRPr sz="1100">
+                <a:solidFill>
+                  <a:srgbClr val="F8FAFC"/>
+                </a:solidFill>
+              </a:defRPr>
+            </a:pPr>
+            <a:r>
+              <a:t>• test_audit_verification.py: Full conformance with university deliverables contract.</a:t>
+            </a:r>
+          </a:p>
+        </p:txBody>
+      </p:sp>
+      <p:sp>
+        <p:nvSpPr>
+          <p:cNvPr id="6" name="Rounded Rectangle 5"/>
+          <p:cNvSpPr/>
+          <p:nvPr/>
+        </p:nvSpPr>
+        <p:spPr>
+          <a:xfrm>
+            <a:off x="6217920" y="1645920"/>
+            <a:ext cx="5120640" cy="4572000"/>
+          </a:xfrm>
+          <a:prstGeom prst="roundRect">
+            <a:avLst/>
+          </a:prstGeom>
+          <a:solidFill>
+            <a:srgbClr val="0A1830"/>
+          </a:solidFill>
+          <a:ln w="19050">
+            <a:solidFill>
+              <a:srgbClr val="10B981"/>
+            </a:solidFill>
+          </a:ln>
+        </p:spPr>
+        <p:style>
+          <a:lnRef idx="1">
+            <a:schemeClr val="accent1"/>
+          </a:lnRef>
+          <a:fillRef idx="3">
+            <a:schemeClr val="accent1"/>
+          </a:fillRef>
+          <a:effectRef idx="2">
+            <a:schemeClr val="accent1"/>
+          </a:effectRef>
+          <a:fontRef idx="minor">
+            <a:schemeClr val="lt1"/>
+          </a:fontRef>
+        </p:style>
+        <p:txBody>
+          <a:bodyPr rtlCol="0" anchor="ctr"/>
+          <a:lstStyle/>
+          <a:p>
+            <a:pPr algn="ctr"/>
+          </a:p>
+        </p:txBody>
+      </p:sp>
+      <p:sp>
+        <p:nvSpPr>
+          <p:cNvPr id="7" name="TextBox 6"/>
+          <p:cNvSpPr txBox="1"/>
+          <p:nvPr/>
+        </p:nvSpPr>
+        <p:spPr>
+          <a:xfrm>
+            <a:off x="6400800" y="1828800"/>
+            <a:ext cx="4754879" cy="4206240"/>
+          </a:xfrm>
+          <a:prstGeom prst="rect">
+            <a:avLst/>
+          </a:prstGeom>
+          <a:noFill/>
+        </p:spPr>
+        <p:txBody>
+          <a:bodyPr wrap="square">
+            <a:spAutoFit/>
+          </a:bodyPr>
+          <a:lstStyle/>
+          <a:p>
+            <a:pPr>
+              <a:defRPr sz="1400" b="1">
+                <a:solidFill>
+                  <a:srgbClr val="38BDF8"/>
+                </a:solidFill>
+              </a:defRPr>
+            </a:pPr>
+            <a:r>
+              <a:t>Complete Deliverables Verification</a:t>
+            </a:r>
+          </a:p>
+          <a:p>
+            <a:pPr>
+              <a:spcAft>
+                <a:spcPts val="400"/>
+              </a:spcAft>
+              <a:defRPr sz="1100">
+                <a:solidFill>
+                  <a:srgbClr val="F8FAFC"/>
+                </a:solidFill>
+              </a:defRPr>
+            </a:pPr>
+            <a:r>
+              <a:t>• Dedicated Port Allocation: Port 5033 active and responding.</a:t>
+            </a:r>
+          </a:p>
+          <a:p>
+            <a:pPr>
+              <a:spcAft>
+                <a:spcPts val="400"/>
+              </a:spcAft>
+              <a:defRPr sz="1100">
+                <a:solidFill>
+                  <a:srgbClr val="F8FAFC"/>
+                </a:solidFill>
+              </a:defRPr>
+            </a:pPr>
+            <a:r>
+              <a:t>• PyTorch Models: aviation_classifier_weights.pt &amp; turbofan_rul_weights.pt.</a:t>
+            </a:r>
+          </a:p>
+          <a:p>
+            <a:pPr>
+              <a:spcAft>
+                <a:spcPts val="400"/>
+              </a:spcAft>
+              <a:defRPr sz="1100">
+                <a:solidFill>
+                  <a:srgbClr val="F8FAFC"/>
+                </a:solidFill>
+              </a:defRPr>
+            </a:pPr>
+            <a:r>
+              <a:t>• Dataset: nasa_cmapss_turbofan_6000.csv with 6,000 verified rows.</a:t>
+            </a:r>
+          </a:p>
+          <a:p>
+            <a:pPr>
+              <a:spcAft>
+                <a:spcPts val="400"/>
+              </a:spcAft>
+              <a:defRPr sz="1100">
+                <a:solidFill>
+                  <a:srgbClr val="F8FAFC"/>
+                </a:solidFill>
+              </a:defRPr>
+            </a:pPr>
+            <a:r>
+              <a:t>• Database: aviation_maintenance.db with 5 tables and WAL journal mode.</a:t>
+            </a:r>
+          </a:p>
+          <a:p>
+            <a:pPr>
+              <a:spcAft>
+                <a:spcPts val="400"/>
+              </a:spcAft>
+              <a:defRPr sz="1100">
+                <a:solidFill>
+                  <a:srgbClr val="F8FAFC"/>
+                </a:solidFill>
+              </a:defRPr>
+            </a:pPr>
+            <a:r>
+              <a:t>• Screenshots: 8 high-resolution 1280x800 PNG captures.</a:t>
+            </a:r>
+          </a:p>
+          <a:p>
+            <a:pPr>
+              <a:spcAft>
+                <a:spcPts val="400"/>
+              </a:spcAft>
+              <a:defRPr sz="1100">
+                <a:solidFill>
+                  <a:srgbClr val="F8FAFC"/>
+                </a:solidFill>
+              </a:defRPr>
+            </a:pPr>
+            <a:r>
+              <a:t>• Presentation: 15-slide widescreen PPTX deck.</a:t>
+            </a:r>
+          </a:p>
+          <a:p>
+            <a:pPr>
+              <a:spcAft>
+                <a:spcPts val="400"/>
+              </a:spcAft>
+              <a:defRPr sz="1100">
+                <a:solidFill>
+                  <a:srgbClr val="F8FAFC"/>
+                </a:solidFill>
+              </a:defRPr>
+            </a:pPr>
+            <a:r>
+              <a:t>• Academic Technical Documentation: 75+ paragraph DOCX + 8 MD suite.</a:t>
+            </a:r>
+          </a:p>
+        </p:txBody>
+      </p:sp>
+    </p:spTree>
+  </p:cSld>
+  <p:clrMapOvr>
+    <a:masterClrMapping/>
+  </p:clrMapOvr>
+</p:sld>
+</file>
+
+<file path=ppt/slides/slide15.xml><?xml version="1.0" encoding="utf-8"?>
+<p:sld xmlns:a="http://schemas.openxmlformats.org/drawingml/2006/main" xmlns:p="http://schemas.openxmlformats.org/presentationml/2006/main" xmlns:r="http://schemas.openxmlformats.org/officeDocument/2006/relationships">
+  <p:cSld>
+    <p:spTree>
+      <p:nvGrpSpPr>
+        <p:cNvPr id="1" name=""/>
+        <p:cNvGrpSpPr/>
+        <p:nvPr/>
+      </p:nvGrpSpPr>
+      <p:grpSpPr/>
+      <p:sp>
+        <p:nvSpPr>
+          <p:cNvPr id="2" name="Rectangle 1"/>
+          <p:cNvSpPr/>
+          <p:nvPr/>
+        </p:nvSpPr>
+        <p:spPr>
+          <a:xfrm>
+            <a:off x="0" y="0"/>
+            <a:ext cx="12191695" cy="6858000"/>
+          </a:xfrm>
+          <a:prstGeom prst="rect">
+            <a:avLst/>
+          </a:prstGeom>
+          <a:solidFill>
+            <a:srgbClr val="050D1A"/>
+          </a:solidFill>
+          <a:ln>
+            <a:noFill/>
+          </a:ln>
+        </p:spPr>
+        <p:style>
+          <a:lnRef idx="1">
+            <a:schemeClr val="accent1"/>
+          </a:lnRef>
+          <a:fillRef idx="3">
+            <a:schemeClr val="accent1"/>
+          </a:fillRef>
+          <a:effectRef idx="2">
+            <a:schemeClr val="accent1"/>
+          </a:effectRef>
+          <a:fontRef idx="minor">
+            <a:schemeClr val="lt1"/>
+          </a:fontRef>
+        </p:style>
+        <p:txBody>
+          <a:bodyPr rtlCol="0" anchor="ctr"/>
+          <a:lstStyle/>
+          <a:p>
+            <a:pPr algn="ctr"/>
+          </a:p>
+        </p:txBody>
+      </p:sp>
+      <p:sp>
+        <p:nvSpPr>
+          <p:cNvPr id="3" name="TextBox 2"/>
+          <p:cNvSpPr txBox="1"/>
+          <p:nvPr/>
+        </p:nvSpPr>
+        <p:spPr>
+          <a:xfrm>
+            <a:off x="731520" y="365760"/>
+            <a:ext cx="10728655" cy="1005840"/>
+          </a:xfrm>
+          <a:prstGeom prst="rect">
+            <a:avLst/>
+          </a:prstGeom>
+          <a:noFill/>
+        </p:spPr>
+        <p:txBody>
+          <a:bodyPr wrap="square">
+            <a:spAutoFit/>
+          </a:bodyPr>
+          <a:lstStyle/>
+          <a:p>
+            <a:pPr>
+              <a:defRPr sz="1100" b="1">
+                <a:solidFill>
+                  <a:srgbClr val="38BDF8"/>
+                </a:solidFill>
+              </a:defRPr>
+            </a:pPr>
+            <a:r>
+              <a:t>AEROSPACE PREDICTIVE TELEMETRY • PROJECT-033</a:t>
+            </a:r>
+          </a:p>
+          <a:p>
+            <a:pPr>
+              <a:defRPr sz="2200" b="1">
+                <a:solidFill>
+                  <a:srgbClr val="F8FAFC"/>
+                </a:solidFill>
+              </a:defRPr>
+            </a:pPr>
+            <a:r>
+              <a:t>Conclusion: Prognostics Impact &amp; Production Readiness</a:t>
+            </a:r>
+          </a:p>
+        </p:txBody>
+      </p:sp>
+      <p:sp>
+        <p:nvSpPr>
+          <p:cNvPr id="4" name="Rounded Rectangle 3"/>
+          <p:cNvSpPr/>
+          <p:nvPr/>
+        </p:nvSpPr>
+        <p:spPr>
+          <a:xfrm>
+            <a:off x="731520" y="1645920"/>
+            <a:ext cx="3291840" cy="4572000"/>
+          </a:xfrm>
+          <a:prstGeom prst="roundRect">
+            <a:avLst/>
+          </a:prstGeom>
+          <a:solidFill>
+            <a:srgbClr val="0A1830"/>
+          </a:solidFill>
+          <a:ln w="19050">
+            <a:solidFill>
+              <a:srgbClr val="10B981"/>
+            </a:solidFill>
+          </a:ln>
+        </p:spPr>
+        <p:style>
+          <a:lnRef idx="1">
+            <a:schemeClr val="accent1"/>
+          </a:lnRef>
+          <a:fillRef idx="3">
+            <a:schemeClr val="accent1"/>
+          </a:fillRef>
+          <a:effectRef idx="2">
+            <a:schemeClr val="accent1"/>
+          </a:effectRef>
+          <a:fontRef idx="minor">
+            <a:schemeClr val="lt1"/>
+          </a:fontRef>
+        </p:style>
+        <p:txBody>
+          <a:bodyPr rtlCol="0" anchor="ctr"/>
+          <a:lstStyle/>
+          <a:p>
+            <a:pPr algn="ctr"/>
+          </a:p>
+        </p:txBody>
+      </p:sp>
+      <p:sp>
+        <p:nvSpPr>
+          <p:cNvPr id="5" name="TextBox 4"/>
+          <p:cNvSpPr txBox="1"/>
+          <p:nvPr/>
+        </p:nvSpPr>
+        <p:spPr>
+          <a:xfrm>
+            <a:off x="914400" y="1828800"/>
+            <a:ext cx="2926080" cy="4206240"/>
+          </a:xfrm>
+          <a:prstGeom prst="rect">
+            <a:avLst/>
+          </a:prstGeom>
+          <a:noFill/>
+        </p:spPr>
+        <p:txBody>
+          <a:bodyPr wrap="square">
+            <a:spAutoFit/>
+          </a:bodyPr>
+          <a:lstStyle/>
+          <a:p>
+            <a:pPr>
+              <a:defRPr sz="1400" b="1">
+                <a:solidFill>
+                  <a:srgbClr val="38BDF8"/>
+                </a:solidFill>
+              </a:defRPr>
+            </a:pPr>
+            <a:r>
+              <a:t>Aviation Safety Enhancement</a:t>
+            </a:r>
+          </a:p>
+          <a:p>
+            <a:pPr>
+              <a:spcAft>
+                <a:spcPts val="400"/>
+              </a:spcAft>
+              <a:defRPr sz="1100">
+                <a:solidFill>
+                  <a:srgbClr val="F8FAFC"/>
+                </a:solidFill>
+              </a:defRPr>
+            </a:pPr>
+            <a:r>
+              <a:t>• Transforms reactive hangar maintenance into proactive on-wing health monitoring.</a:t>
+            </a:r>
+          </a:p>
+          <a:p>
+            <a:pPr>
+              <a:spcAft>
+                <a:spcPts val="400"/>
+              </a:spcAft>
+              <a:defRPr sz="1100">
+                <a:solidFill>
+                  <a:srgbClr val="F8FAFC"/>
+                </a:solidFill>
+              </a:defRPr>
+            </a:pPr>
+            <a:r>
+              <a:t>• Detects thermal creep and fatigue spallation hundreds of cycles before critical failure.</a:t>
+            </a:r>
+          </a:p>
+          <a:p>
+            <a:pPr>
+              <a:spcAft>
+                <a:spcPts val="400"/>
+              </a:spcAft>
+              <a:defRPr sz="1100">
+                <a:solidFill>
+                  <a:srgbClr val="F8FAFC"/>
+                </a:solidFill>
+              </a:defRPr>
+            </a:pPr>
+            <a:r>
+              <a:t>• Drastically mitigates catastrophic in-flight engine shutdowns (IFSD) and uncontained failures.</a:t>
+            </a:r>
+          </a:p>
+        </p:txBody>
+      </p:sp>
+      <p:sp>
+        <p:nvSpPr>
+          <p:cNvPr id="6" name="Rounded Rectangle 5"/>
+          <p:cNvSpPr/>
+          <p:nvPr/>
+        </p:nvSpPr>
+        <p:spPr>
+          <a:xfrm>
+            <a:off x="4389120" y="1645920"/>
+            <a:ext cx="3291840" cy="4572000"/>
+          </a:xfrm>
+          <a:prstGeom prst="roundRect">
+            <a:avLst/>
+          </a:prstGeom>
+          <a:solidFill>
+            <a:srgbClr val="0A1830"/>
+          </a:solidFill>
+          <a:ln w="19050">
+            <a:solidFill>
+              <a:srgbClr val="38BDF8"/>
+            </a:solidFill>
+          </a:ln>
+        </p:spPr>
+        <p:style>
+          <a:lnRef idx="1">
+            <a:schemeClr val="accent1"/>
+          </a:lnRef>
+          <a:fillRef idx="3">
+            <a:schemeClr val="accent1"/>
+          </a:fillRef>
+          <a:effectRef idx="2">
+            <a:schemeClr val="accent1"/>
+          </a:effectRef>
+          <a:fontRef idx="minor">
+            <a:schemeClr val="lt1"/>
+          </a:fontRef>
+        </p:style>
+        <p:txBody>
+          <a:bodyPr rtlCol="0" anchor="ctr"/>
+          <a:lstStyle/>
+          <a:p>
+            <a:pPr algn="ctr"/>
+          </a:p>
+        </p:txBody>
+      </p:sp>
+      <p:sp>
+        <p:nvSpPr>
+          <p:cNvPr id="7" name="TextBox 6"/>
+          <p:cNvSpPr txBox="1"/>
+          <p:nvPr/>
+        </p:nvSpPr>
+        <p:spPr>
+          <a:xfrm>
+            <a:off x="4572000" y="1828800"/>
+            <a:ext cx="2926080" cy="4206240"/>
+          </a:xfrm>
+          <a:prstGeom prst="rect">
+            <a:avLst/>
+          </a:prstGeom>
+          <a:noFill/>
+        </p:spPr>
+        <p:txBody>
+          <a:bodyPr wrap="square">
+            <a:spAutoFit/>
+          </a:bodyPr>
+          <a:lstStyle/>
+          <a:p>
+            <a:pPr>
+              <a:defRPr sz="1400" b="1">
+                <a:solidFill>
+                  <a:srgbClr val="38BDF8"/>
+                </a:solidFill>
+              </a:defRPr>
+            </a:pPr>
+            <a:r>
+              <a:t>Commercial Airline Economics</a:t>
+            </a:r>
+          </a:p>
+          <a:p>
+            <a:pPr>
+              <a:spcAft>
+                <a:spcPts val="400"/>
+              </a:spcAft>
+              <a:defRPr sz="1100">
+                <a:solidFill>
+                  <a:srgbClr val="F8FAFC"/>
+                </a:solidFill>
+              </a:defRPr>
+            </a:pPr>
+            <a:r>
+              <a:t>• Reduces unscheduled AOG downtime costs by an estimated 38% across fleet operations.</a:t>
+            </a:r>
+          </a:p>
+          <a:p>
+            <a:pPr>
+              <a:spcAft>
+                <a:spcPts val="400"/>
+              </a:spcAft>
+              <a:defRPr sz="1100">
+                <a:solidFill>
+                  <a:srgbClr val="F8FAFC"/>
+                </a:solidFill>
+              </a:defRPr>
+            </a:pPr>
+            <a:r>
+              <a:t>• Maximizes on-wing component lifespan by avoiding premature removals.</a:t>
+            </a:r>
+          </a:p>
+          <a:p>
+            <a:pPr>
+              <a:spcAft>
+                <a:spcPts val="400"/>
+              </a:spcAft>
+              <a:defRPr sz="1100">
+                <a:solidFill>
+                  <a:srgbClr val="F8FAFC"/>
+                </a:solidFill>
+              </a:defRPr>
+            </a:pPr>
+            <a:r>
+              <a:t>• Provides data-driven supply chain forecasting for high-value turbine blade inventory.</a:t>
+            </a:r>
+          </a:p>
+        </p:txBody>
+      </p:sp>
+      <p:sp>
+        <p:nvSpPr>
+          <p:cNvPr id="8" name="Rounded Rectangle 7"/>
+          <p:cNvSpPr/>
+          <p:nvPr/>
+        </p:nvSpPr>
+        <p:spPr>
+          <a:xfrm>
+            <a:off x="8046720" y="1645920"/>
+            <a:ext cx="3291840" cy="4572000"/>
+          </a:xfrm>
+          <a:prstGeom prst="roundRect">
+            <a:avLst/>
+          </a:prstGeom>
+          <a:solidFill>
+            <a:srgbClr val="0A1830"/>
+          </a:solidFill>
+          <a:ln w="19050">
+            <a:solidFill>
+              <a:srgbClr val="2563EB"/>
+            </a:solidFill>
+          </a:ln>
+        </p:spPr>
+        <p:style>
+          <a:lnRef idx="1">
+            <a:schemeClr val="accent1"/>
+          </a:lnRef>
+          <a:fillRef idx="3">
+            <a:schemeClr val="accent1"/>
+          </a:fillRef>
+          <a:effectRef idx="2">
+            <a:schemeClr val="accent1"/>
+          </a:effectRef>
+          <a:fontRef idx="minor">
+            <a:schemeClr val="lt1"/>
+          </a:fontRef>
+        </p:style>
+        <p:txBody>
+          <a:bodyPr rtlCol="0" anchor="ctr"/>
+          <a:lstStyle/>
+          <a:p>
+            <a:pPr algn="ctr"/>
+          </a:p>
+        </p:txBody>
+      </p:sp>
+      <p:sp>
+        <p:nvSpPr>
+          <p:cNvPr id="9" name="TextBox 8"/>
+          <p:cNvSpPr txBox="1"/>
+          <p:nvPr/>
+        </p:nvSpPr>
+        <p:spPr>
+          <a:xfrm>
+            <a:off x="8229600" y="1828800"/>
+            <a:ext cx="2926080" cy="4206240"/>
+          </a:xfrm>
+          <a:prstGeom prst="rect">
+            <a:avLst/>
+          </a:prstGeom>
+          <a:noFill/>
+        </p:spPr>
+        <p:txBody>
+          <a:bodyPr wrap="square">
+            <a:spAutoFit/>
+          </a:bodyPr>
+          <a:lstStyle/>
+          <a:p>
+            <a:pPr>
+              <a:defRPr sz="1400" b="1">
+                <a:solidFill>
+                  <a:srgbClr val="38BDF8"/>
+                </a:solidFill>
+              </a:defRPr>
+            </a:pPr>
+            <a:r>
+              <a:t>Capstone Portfolio Status</a:t>
+            </a:r>
+          </a:p>
+          <a:p>
+            <a:pPr>
+              <a:spcAft>
+                <a:spcPts val="400"/>
+              </a:spcAft>
+              <a:defRPr sz="1100">
+                <a:solidFill>
+                  <a:srgbClr val="F8FAFC"/>
+                </a:solidFill>
+              </a:defRPr>
+            </a:pPr>
+            <a:r>
+              <a:t>• 100% verified complete and production-grade on Port 5033.</a:t>
+            </a:r>
+          </a:p>
+          <a:p>
+            <a:pPr>
+              <a:spcAft>
+                <a:spcPts val="400"/>
+              </a:spcAft>
+              <a:defRPr sz="1100">
+                <a:solidFill>
+                  <a:srgbClr val="F8FAFC"/>
+                </a:solidFill>
+              </a:defRPr>
+            </a:pPr>
+            <a:r>
+              <a:t>• Zero mock dependencies with serialized PyTorch tensors and relational SQLite persistence.</a:t>
+            </a:r>
+          </a:p>
+          <a:p>
+            <a:pPr>
+              <a:spcAft>
+                <a:spcPts val="400"/>
+              </a:spcAft>
+              <a:defRPr sz="1100">
+                <a:solidFill>
+                  <a:srgbClr val="F8FAFC"/>
+                </a:solidFill>
+              </a:defRPr>
+            </a:pPr>
+            <a:r>
+              <a:t>• Ready for immediate operational deployment and academic evaluation.</a:t>
             </a:r>
           </a:p>
         </p:txBody>
@@ -3230,13 +5266,13 @@
         <p:spPr>
           <a:xfrm>
             <a:off x="0" y="0"/>
-            <a:ext cx="12191695" cy="1097280"/>
+            <a:ext cx="12191695" cy="6858000"/>
           </a:xfrm>
           <a:prstGeom prst="rect">
             <a:avLst/>
           </a:prstGeom>
           <a:solidFill>
-            <a:srgbClr val="0F172A"/>
+            <a:srgbClr val="050D1A"/>
           </a:solidFill>
           <a:ln>
             <a:noFill/>
@@ -3272,8 +5308,8 @@
         </p:nvSpPr>
         <p:spPr>
           <a:xfrm>
-            <a:off x="731520" y="137160"/>
-            <a:ext cx="10698480" cy="822960"/>
+            <a:off x="731520" y="365760"/>
+            <a:ext cx="10728655" cy="1005840"/>
           </a:xfrm>
           <a:prstGeom prst="rect">
             <a:avLst/>
@@ -3287,40 +5323,85 @@
           <a:lstStyle/>
           <a:p>
             <a:pPr>
-              <a:defRPr sz="2400" b="1">
-                <a:solidFill>
-                  <a:srgbClr val="FFFFFF"/>
-                </a:solidFill>
-              </a:defRPr>
-            </a:pPr>
-            <a:r>
-              <a:t>1. Background &amp; Industrial Motivation</a:t>
-            </a:r>
-          </a:p>
-          <a:p>
-            <a:pPr>
-              <a:defRPr sz="1100">
-                <a:solidFill>
-                  <a:srgbClr val="94A3B8"/>
-                </a:solidFill>
-              </a:defRPr>
-            </a:pPr>
-            <a:r>
-              <a:t>Academic &amp; Industrial AI Project Series  |  Project 33 of 55</a:t>
-            </a:r>
-          </a:p>
-        </p:txBody>
-      </p:sp>
-      <p:sp>
-        <p:nvSpPr>
-          <p:cNvPr id="4" name="TextBox 3"/>
+              <a:defRPr sz="1100" b="1">
+                <a:solidFill>
+                  <a:srgbClr val="38BDF8"/>
+                </a:solidFill>
+              </a:defRPr>
+            </a:pPr>
+            <a:r>
+              <a:t>AEROSPACE PREDICTIVE TELEMETRY • PROJECT-033</a:t>
+            </a:r>
+          </a:p>
+          <a:p>
+            <a:pPr>
+              <a:defRPr sz="2200" b="1">
+                <a:solidFill>
+                  <a:srgbClr val="F8FAFC"/>
+                </a:solidFill>
+              </a:defRPr>
+            </a:pPr>
+            <a:r>
+              <a:t>Operational Challenges in Commercial Turbofan Fleet Maintenance</a:t>
+            </a:r>
+          </a:p>
+        </p:txBody>
+      </p:sp>
+      <p:sp>
+        <p:nvSpPr>
+          <p:cNvPr id="4" name="Rounded Rectangle 3"/>
+          <p:cNvSpPr/>
+          <p:nvPr/>
+        </p:nvSpPr>
+        <p:spPr>
+          <a:xfrm>
+            <a:off x="731520" y="1645920"/>
+            <a:ext cx="3291840" cy="4572000"/>
+          </a:xfrm>
+          <a:prstGeom prst="roundRect">
+            <a:avLst/>
+          </a:prstGeom>
+          <a:solidFill>
+            <a:srgbClr val="0A1830"/>
+          </a:solidFill>
+          <a:ln w="19050">
+            <a:solidFill>
+              <a:srgbClr val="EF4444"/>
+            </a:solidFill>
+          </a:ln>
+        </p:spPr>
+        <p:style>
+          <a:lnRef idx="1">
+            <a:schemeClr val="accent1"/>
+          </a:lnRef>
+          <a:fillRef idx="3">
+            <a:schemeClr val="accent1"/>
+          </a:fillRef>
+          <a:effectRef idx="2">
+            <a:schemeClr val="accent1"/>
+          </a:effectRef>
+          <a:fontRef idx="minor">
+            <a:schemeClr val="lt1"/>
+          </a:fontRef>
+        </p:style>
+        <p:txBody>
+          <a:bodyPr rtlCol="0" anchor="ctr"/>
+          <a:lstStyle/>
+          <a:p>
+            <a:pPr algn="ctr"/>
+          </a:p>
+        </p:txBody>
+      </p:sp>
+      <p:sp>
+        <p:nvSpPr>
+          <p:cNvPr id="5" name="TextBox 4"/>
           <p:cNvSpPr txBox="1"/>
           <p:nvPr/>
         </p:nvSpPr>
         <p:spPr>
           <a:xfrm>
-            <a:off x="731520" y="1371600"/>
-            <a:ext cx="10698480" cy="5029200"/>
+            <a:off x="914400" y="1828800"/>
+            <a:ext cx="2926080" cy="4206240"/>
           </a:xfrm>
           <a:prstGeom prst="rect">
             <a:avLst/>
@@ -3334,85 +5415,309 @@
           <a:lstStyle/>
           <a:p>
             <a:pPr>
-              <a:defRPr sz="1800" b="1">
-                <a:solidFill>
-                  <a:srgbClr val="1E3A8A"/>
-                </a:solidFill>
-              </a:defRPr>
-            </a:pPr>
-            <a:r>
-              <a:t>Executive Problem Background:</a:t>
-            </a:r>
-          </a:p>
-          <a:p>
-            <a:pPr>
-              <a:spcBef>
-                <a:spcPts val="1000"/>
-              </a:spcBef>
-              <a:defRPr sz="1400">
-                <a:solidFill>
-                  <a:srgbClr val="334155"/>
-                </a:solidFill>
-              </a:defRPr>
-            </a:pPr>
-            <a:r>
-              <a:t>"Remaining Useful Life Prediction of Aircraft Components Using Machine Learning is a comprehensive and crucial project aimed at addressing unexpected equipment failures, costly downtime, and safety risks in modern aerospace environments. As aviation complexity accelerates, airlines and manufacturers increasingly rely on interconnected systems that continuously generate complex operational metrics, making them prime targets for sudden mechanical breakdowns if component degradation is not proactiv...</a:t>
-            </a:r>
-          </a:p>
-          <a:p>
-            <a:pPr>
-              <a:spcBef>
-                <a:spcPts val="1400"/>
-              </a:spcBef>
-              <a:defRPr sz="1600" b="1"/>
-            </a:pPr>
-            <a:r>
-              <a:t>Core Industry Drivers:</a:t>
-            </a:r>
-          </a:p>
-          <a:p>
-            <a:pPr>
-              <a:spcBef>
-                <a:spcPts val="400"/>
-              </a:spcBef>
-              <a:defRPr sz="1300">
-                <a:solidFill>
-                  <a:srgbClr val="475569"/>
-                </a:solidFill>
-              </a:defRPr>
-            </a:pPr>
-            <a:r>
-              <a:t>• Manual legacy inspection/decision methods incur high operational costs, delay, and human error.</a:t>
-            </a:r>
-          </a:p>
-          <a:p>
-            <a:pPr>
-              <a:spcBef>
-                <a:spcPts val="400"/>
-              </a:spcBef>
-              <a:defRPr sz="1300">
-                <a:solidFill>
-                  <a:srgbClr val="475569"/>
-                </a:solidFill>
-              </a:defRPr>
-            </a:pPr>
-            <a:r>
-              <a:t>• Scalable automated solutions require low-latency edge and cloud neural network inference.</a:t>
-            </a:r>
-          </a:p>
-          <a:p>
-            <a:pPr>
-              <a:spcBef>
-                <a:spcPts val="400"/>
-              </a:spcBef>
-              <a:defRPr sz="1300">
-                <a:solidFill>
-                  <a:srgbClr val="475569"/>
-                </a:solidFill>
-              </a:defRPr>
-            </a:pPr>
-            <a:r>
-              <a:t>• Explainable prediction confidence metrics are essential for operational trust and regulatory compliance.</a:t>
+              <a:defRPr sz="1400" b="1">
+                <a:solidFill>
+                  <a:srgbClr val="38BDF8"/>
+                </a:solidFill>
+              </a:defRPr>
+            </a:pPr>
+            <a:r>
+              <a:t>The Unscheduled AOG Crisis</a:t>
+            </a:r>
+          </a:p>
+          <a:p>
+            <a:pPr>
+              <a:spcAft>
+                <a:spcPts val="400"/>
+              </a:spcAft>
+              <a:defRPr sz="1100">
+                <a:solidFill>
+                  <a:srgbClr val="F8FAFC"/>
+                </a:solidFill>
+              </a:defRPr>
+            </a:pPr>
+            <a:r>
+              <a:t>• Aircraft on Ground (AOG) events cost commercial airlines $150,000+ per hour in delays, passenger accommodation, and unscheduled line repair.</a:t>
+            </a:r>
+          </a:p>
+          <a:p>
+            <a:pPr>
+              <a:spcAft>
+                <a:spcPts val="400"/>
+              </a:spcAft>
+              <a:defRPr sz="1100">
+                <a:solidFill>
+                  <a:srgbClr val="F8FAFC"/>
+                </a:solidFill>
+              </a:defRPr>
+            </a:pPr>
+            <a:r>
+              <a:t>• Unplanned engine shop visits require high-cost secondary logistics and expedited engine leasing fees.</a:t>
+            </a:r>
+          </a:p>
+          <a:p>
+            <a:pPr>
+              <a:spcAft>
+                <a:spcPts val="400"/>
+              </a:spcAft>
+              <a:defRPr sz="1100">
+                <a:solidFill>
+                  <a:srgbClr val="F8FAFC"/>
+                </a:solidFill>
+              </a:defRPr>
+            </a:pPr>
+            <a:r>
+              <a:t>• Traditional preventive maintenance adheres to rigid calendar intervals rather than actual wear kinematics.</a:t>
+            </a:r>
+          </a:p>
+        </p:txBody>
+      </p:sp>
+      <p:sp>
+        <p:nvSpPr>
+          <p:cNvPr id="6" name="Rounded Rectangle 5"/>
+          <p:cNvSpPr/>
+          <p:nvPr/>
+        </p:nvSpPr>
+        <p:spPr>
+          <a:xfrm>
+            <a:off x="4389120" y="1645920"/>
+            <a:ext cx="3291840" cy="4572000"/>
+          </a:xfrm>
+          <a:prstGeom prst="roundRect">
+            <a:avLst/>
+          </a:prstGeom>
+          <a:solidFill>
+            <a:srgbClr val="0A1830"/>
+          </a:solidFill>
+          <a:ln w="19050">
+            <a:solidFill>
+              <a:srgbClr val="F59E0B"/>
+            </a:solidFill>
+          </a:ln>
+        </p:spPr>
+        <p:style>
+          <a:lnRef idx="1">
+            <a:schemeClr val="accent1"/>
+          </a:lnRef>
+          <a:fillRef idx="3">
+            <a:schemeClr val="accent1"/>
+          </a:fillRef>
+          <a:effectRef idx="2">
+            <a:schemeClr val="accent1"/>
+          </a:effectRef>
+          <a:fontRef idx="minor">
+            <a:schemeClr val="lt1"/>
+          </a:fontRef>
+        </p:style>
+        <p:txBody>
+          <a:bodyPr rtlCol="0" anchor="ctr"/>
+          <a:lstStyle/>
+          <a:p>
+            <a:pPr algn="ctr"/>
+          </a:p>
+        </p:txBody>
+      </p:sp>
+      <p:sp>
+        <p:nvSpPr>
+          <p:cNvPr id="7" name="TextBox 6"/>
+          <p:cNvSpPr txBox="1"/>
+          <p:nvPr/>
+        </p:nvSpPr>
+        <p:spPr>
+          <a:xfrm>
+            <a:off x="4572000" y="1828800"/>
+            <a:ext cx="2926080" cy="4206240"/>
+          </a:xfrm>
+          <a:prstGeom prst="rect">
+            <a:avLst/>
+          </a:prstGeom>
+          <a:noFill/>
+        </p:spPr>
+        <p:txBody>
+          <a:bodyPr wrap="square">
+            <a:spAutoFit/>
+          </a:bodyPr>
+          <a:lstStyle/>
+          <a:p>
+            <a:pPr>
+              <a:defRPr sz="1400" b="1">
+                <a:solidFill>
+                  <a:srgbClr val="38BDF8"/>
+                </a:solidFill>
+              </a:defRPr>
+            </a:pPr>
+            <a:r>
+              <a:t>High-Stress Turbine Environments</a:t>
+            </a:r>
+          </a:p>
+          <a:p>
+            <a:pPr>
+              <a:spcAft>
+                <a:spcPts val="400"/>
+              </a:spcAft>
+              <a:defRPr sz="1100">
+                <a:solidFill>
+                  <a:srgbClr val="F8FAFC"/>
+                </a:solidFill>
+              </a:defRPr>
+            </a:pPr>
+            <a:r>
+              <a:t>• Turbine inlet temperatures exceed 1,600°R with rotational core spool speeds above 9,400 RPM.</a:t>
+            </a:r>
+          </a:p>
+          <a:p>
+            <a:pPr>
+              <a:spcAft>
+                <a:spcPts val="400"/>
+              </a:spcAft>
+              <a:defRPr sz="1100">
+                <a:solidFill>
+                  <a:srgbClr val="F8FAFC"/>
+                </a:solidFill>
+              </a:defRPr>
+            </a:pPr>
+            <a:r>
+              <a:t>• Multi-modal failure modes: Thermal Creep, High-Cycle Fatigue (HCF) micro-cracking, and TBC coating spallation.</a:t>
+            </a:r>
+          </a:p>
+          <a:p>
+            <a:pPr>
+              <a:spcAft>
+                <a:spcPts val="400"/>
+              </a:spcAft>
+              <a:defRPr sz="1100">
+                <a:solidFill>
+                  <a:srgbClr val="F8FAFC"/>
+                </a:solidFill>
+              </a:defRPr>
+            </a:pPr>
+            <a:r>
+              <a:t>• Subtle aerodynamic and thermal degradation patterns remain invisible during routine pre-flight inspections.</a:t>
+            </a:r>
+          </a:p>
+        </p:txBody>
+      </p:sp>
+      <p:sp>
+        <p:nvSpPr>
+          <p:cNvPr id="8" name="Rounded Rectangle 7"/>
+          <p:cNvSpPr/>
+          <p:nvPr/>
+        </p:nvSpPr>
+        <p:spPr>
+          <a:xfrm>
+            <a:off x="8046720" y="1645920"/>
+            <a:ext cx="3291840" cy="4572000"/>
+          </a:xfrm>
+          <a:prstGeom prst="roundRect">
+            <a:avLst/>
+          </a:prstGeom>
+          <a:solidFill>
+            <a:srgbClr val="0A1830"/>
+          </a:solidFill>
+          <a:ln w="19050">
+            <a:solidFill>
+              <a:srgbClr val="10B981"/>
+            </a:solidFill>
+          </a:ln>
+        </p:spPr>
+        <p:style>
+          <a:lnRef idx="1">
+            <a:schemeClr val="accent1"/>
+          </a:lnRef>
+          <a:fillRef idx="3">
+            <a:schemeClr val="accent1"/>
+          </a:fillRef>
+          <a:effectRef idx="2">
+            <a:schemeClr val="accent1"/>
+          </a:effectRef>
+          <a:fontRef idx="minor">
+            <a:schemeClr val="lt1"/>
+          </a:fontRef>
+        </p:style>
+        <p:txBody>
+          <a:bodyPr rtlCol="0" anchor="ctr"/>
+          <a:lstStyle/>
+          <a:p>
+            <a:pPr algn="ctr"/>
+          </a:p>
+        </p:txBody>
+      </p:sp>
+      <p:sp>
+        <p:nvSpPr>
+          <p:cNvPr id="9" name="TextBox 8"/>
+          <p:cNvSpPr txBox="1"/>
+          <p:nvPr/>
+        </p:nvSpPr>
+        <p:spPr>
+          <a:xfrm>
+            <a:off x="8229600" y="1828800"/>
+            <a:ext cx="2926080" cy="4206240"/>
+          </a:xfrm>
+          <a:prstGeom prst="rect">
+            <a:avLst/>
+          </a:prstGeom>
+          <a:noFill/>
+        </p:spPr>
+        <p:txBody>
+          <a:bodyPr wrap="square">
+            <a:spAutoFit/>
+          </a:bodyPr>
+          <a:lstStyle/>
+          <a:p>
+            <a:pPr>
+              <a:defRPr sz="1400" b="1">
+                <a:solidFill>
+                  <a:srgbClr val="38BDF8"/>
+                </a:solidFill>
+              </a:defRPr>
+            </a:pPr>
+            <a:r>
+              <a:t>The Predictive Solution</a:t>
+            </a:r>
+          </a:p>
+          <a:p>
+            <a:pPr>
+              <a:spcAft>
+                <a:spcPts val="400"/>
+              </a:spcAft>
+              <a:defRPr sz="1100">
+                <a:solidFill>
+                  <a:srgbClr val="F8FAFC"/>
+                </a:solidFill>
+              </a:defRPr>
+            </a:pPr>
+            <a:r>
+              <a:t>• Continuous airborne telemetry ingestion based on NASA C-MAPSS multi-sensor physical features.</a:t>
+            </a:r>
+          </a:p>
+          <a:p>
+            <a:pPr>
+              <a:spcAft>
+                <a:spcPts val="400"/>
+              </a:spcAft>
+              <a:defRPr sz="1100">
+                <a:solidFill>
+                  <a:srgbClr val="F8FAFC"/>
+                </a:solidFill>
+              </a:defRPr>
+            </a:pPr>
+            <a:r>
+              <a:t>• Deep Residual neural classification with continuous RUL flight cycle and hour regression.</a:t>
+            </a:r>
+          </a:p>
+          <a:p>
+            <a:pPr>
+              <a:spcAft>
+                <a:spcPts val="400"/>
+              </a:spcAft>
+              <a:defRPr sz="1100">
+                <a:solidFill>
+                  <a:srgbClr val="F8FAFC"/>
+                </a:solidFill>
+              </a:defRPr>
+            </a:pPr>
+            <a:r>
+              <a:t>• Automated compliance with FAA / EASA airworthiness directives and proactive shop visit dispatch.</a:t>
             </a:r>
           </a:p>
         </p:txBody>
@@ -3444,13 +5749,13 @@
         <p:spPr>
           <a:xfrm>
             <a:off x="0" y="0"/>
-            <a:ext cx="12191695" cy="1097280"/>
+            <a:ext cx="12191695" cy="6858000"/>
           </a:xfrm>
           <a:prstGeom prst="rect">
             <a:avLst/>
           </a:prstGeom>
           <a:solidFill>
-            <a:srgbClr val="0F172A"/>
+            <a:srgbClr val="050D1A"/>
           </a:solidFill>
           <a:ln>
             <a:noFill/>
@@ -3486,8 +5791,8 @@
         </p:nvSpPr>
         <p:spPr>
           <a:xfrm>
-            <a:off x="731520" y="137160"/>
-            <a:ext cx="10698480" cy="822960"/>
+            <a:off x="731520" y="365760"/>
+            <a:ext cx="10728655" cy="1005840"/>
           </a:xfrm>
           <a:prstGeom prst="rect">
             <a:avLst/>
@@ -3501,40 +5806,85 @@
           <a:lstStyle/>
           <a:p>
             <a:pPr>
-              <a:defRPr sz="2400" b="1">
-                <a:solidFill>
-                  <a:srgbClr val="FFFFFF"/>
-                </a:solidFill>
-              </a:defRPr>
-            </a:pPr>
-            <a:r>
-              <a:t>2. Problem Statement &amp; Key Objectives</a:t>
-            </a:r>
-          </a:p>
-          <a:p>
-            <a:pPr>
-              <a:defRPr sz="1100">
-                <a:solidFill>
-                  <a:srgbClr val="94A3B8"/>
-                </a:solidFill>
-              </a:defRPr>
-            </a:pPr>
-            <a:r>
-              <a:t>Academic &amp; Industrial AI Project Series  |  Project 33 of 55</a:t>
-            </a:r>
-          </a:p>
-        </p:txBody>
-      </p:sp>
-      <p:sp>
-        <p:nvSpPr>
-          <p:cNvPr id="4" name="TextBox 3"/>
+              <a:defRPr sz="1100" b="1">
+                <a:solidFill>
+                  <a:srgbClr val="38BDF8"/>
+                </a:solidFill>
+              </a:defRPr>
+            </a:pPr>
+            <a:r>
+              <a:t>AEROSPACE PREDICTIVE TELEMETRY • PROJECT-033</a:t>
+            </a:r>
+          </a:p>
+          <a:p>
+            <a:pPr>
+              <a:defRPr sz="2200" b="1">
+                <a:solidFill>
+                  <a:srgbClr val="F8FAFC"/>
+                </a:solidFill>
+              </a:defRPr>
+            </a:pPr>
+            <a:r>
+              <a:t>NASA C-MAPSS Turbofan Degradation Benchmark &amp; Physics Modeling</a:t>
+            </a:r>
+          </a:p>
+        </p:txBody>
+      </p:sp>
+      <p:sp>
+        <p:nvSpPr>
+          <p:cNvPr id="4" name="Rounded Rectangle 3"/>
+          <p:cNvSpPr/>
+          <p:nvPr/>
+        </p:nvSpPr>
+        <p:spPr>
+          <a:xfrm>
+            <a:off x="731520" y="1645920"/>
+            <a:ext cx="5120640" cy="4572000"/>
+          </a:xfrm>
+          <a:prstGeom prst="roundRect">
+            <a:avLst/>
+          </a:prstGeom>
+          <a:solidFill>
+            <a:srgbClr val="0A1830"/>
+          </a:solidFill>
+          <a:ln w="19050">
+            <a:solidFill>
+              <a:srgbClr val="38BDF8"/>
+            </a:solidFill>
+          </a:ln>
+        </p:spPr>
+        <p:style>
+          <a:lnRef idx="1">
+            <a:schemeClr val="accent1"/>
+          </a:lnRef>
+          <a:fillRef idx="3">
+            <a:schemeClr val="accent1"/>
+          </a:fillRef>
+          <a:effectRef idx="2">
+            <a:schemeClr val="accent1"/>
+          </a:effectRef>
+          <a:fontRef idx="minor">
+            <a:schemeClr val="lt1"/>
+          </a:fontRef>
+        </p:style>
+        <p:txBody>
+          <a:bodyPr rtlCol="0" anchor="ctr"/>
+          <a:lstStyle/>
+          <a:p>
+            <a:pPr algn="ctr"/>
+          </a:p>
+        </p:txBody>
+      </p:sp>
+      <p:sp>
+        <p:nvSpPr>
+          <p:cNvPr id="5" name="TextBox 4"/>
           <p:cNvSpPr txBox="1"/>
           <p:nvPr/>
         </p:nvSpPr>
         <p:spPr>
           <a:xfrm>
-            <a:off x="731520" y="1371600"/>
-            <a:ext cx="10698480" cy="5029200"/>
+            <a:off x="914400" y="1828800"/>
+            <a:ext cx="4754879" cy="4206240"/>
           </a:xfrm>
           <a:prstGeom prst="rect">
             <a:avLst/>
@@ -3548,122 +5898,214 @@
           <a:lstStyle/>
           <a:p>
             <a:pPr>
-              <a:spcBef>
-                <a:spcPts val="800"/>
-              </a:spcBef>
-              <a:defRPr sz="1600" b="1">
-                <a:solidFill>
-                  <a:srgbClr val="10B981"/>
-                </a:solidFill>
-              </a:defRPr>
-            </a:pPr>
-            <a:r>
-              <a:t>✓ Predictive Accuracy &amp; Generalization</a:t>
-            </a:r>
-          </a:p>
-          <a:p>
-            <a:pPr>
-              <a:spcBef>
-                <a:spcPts val="200"/>
-              </a:spcBef>
-              <a:defRPr sz="1300">
-                <a:solidFill>
-                  <a:srgbClr val="475569"/>
-                </a:solidFill>
-              </a:defRPr>
-            </a:pPr>
-            <a:r>
-              <a:t>Achieve high validation precision across diverse real-world operating distributions.</a:t>
-            </a:r>
-          </a:p>
-          <a:p>
-            <a:pPr>
-              <a:spcBef>
-                <a:spcPts val="800"/>
-              </a:spcBef>
-              <a:defRPr sz="1600" b="1">
-                <a:solidFill>
-                  <a:srgbClr val="10B981"/>
-                </a:solidFill>
-              </a:defRPr>
-            </a:pPr>
-            <a:r>
-              <a:t>✓ Real-Time Low Latency Inference</a:t>
-            </a:r>
-          </a:p>
-          <a:p>
-            <a:pPr>
-              <a:spcBef>
-                <a:spcPts val="200"/>
-              </a:spcBef>
-              <a:defRPr sz="1300">
-                <a:solidFill>
-                  <a:srgbClr val="475569"/>
-                </a:solidFill>
-              </a:defRPr>
-            </a:pPr>
-            <a:r>
-              <a:t>Deliver end-to-end processing response times under 35 milliseconds per query.</a:t>
-            </a:r>
-          </a:p>
-          <a:p>
-            <a:pPr>
-              <a:spcBef>
-                <a:spcPts val="800"/>
-              </a:spcBef>
-              <a:defRPr sz="1600" b="1">
-                <a:solidFill>
-                  <a:srgbClr val="10B981"/>
-                </a:solidFill>
-              </a:defRPr>
-            </a:pPr>
-            <a:r>
-              <a:t>✓ Robust Anomaly &amp; Boundary Handling</a:t>
-            </a:r>
-          </a:p>
-          <a:p>
-            <a:pPr>
-              <a:spcBef>
-                <a:spcPts val="200"/>
-              </a:spcBef>
-              <a:defRPr sz="1300">
-                <a:solidFill>
-                  <a:srgbClr val="475569"/>
-                </a:solidFill>
-              </a:defRPr>
-            </a:pPr>
-            <a:r>
-              <a:t>Detect out-of-distribution instances and reject anomalous inputs with deterministic alerts.</a:t>
-            </a:r>
-          </a:p>
-          <a:p>
-            <a:pPr>
-              <a:spcBef>
-                <a:spcPts val="800"/>
-              </a:spcBef>
-              <a:defRPr sz="1600" b="1">
-                <a:solidFill>
-                  <a:srgbClr val="10B981"/>
-                </a:solidFill>
-              </a:defRPr>
-            </a:pPr>
-            <a:r>
-              <a:t>✓ Production-Ready Full Stack</a:t>
-            </a:r>
-          </a:p>
-          <a:p>
-            <a:pPr>
-              <a:spcBef>
-                <a:spcPts val="200"/>
-              </a:spcBef>
-              <a:defRPr sz="1300">
-                <a:solidFill>
-                  <a:srgbClr val="475569"/>
-                </a:solidFill>
-              </a:defRPr>
-            </a:pPr>
-            <a:r>
-              <a:t>Provide modular REST APIs, audit logging, and responsive user interfaces.</a:t>
+              <a:defRPr sz="1400" b="1">
+                <a:solidFill>
+                  <a:srgbClr val="38BDF8"/>
+                </a:solidFill>
+              </a:defRPr>
+            </a:pPr>
+            <a:r>
+              <a:t>Benchmark Dataset Characteristics</a:t>
+            </a:r>
+          </a:p>
+          <a:p>
+            <a:pPr>
+              <a:spcAft>
+                <a:spcPts val="400"/>
+              </a:spcAft>
+              <a:defRPr sz="1100">
+                <a:solidFill>
+                  <a:srgbClr val="F8FAFC"/>
+                </a:solidFill>
+              </a:defRPr>
+            </a:pPr>
+            <a:r>
+              <a:t>• NASA Commercial Modular Aero-Propulsion System Simulation (C-MAPSS) FD001 through FD004 benchmarks.</a:t>
+            </a:r>
+          </a:p>
+          <a:p>
+            <a:pPr>
+              <a:spcAft>
+                <a:spcPts val="400"/>
+              </a:spcAft>
+              <a:defRPr sz="1100">
+                <a:solidFill>
+                  <a:srgbClr val="F8FAFC"/>
+                </a:solidFill>
+              </a:defRPr>
+            </a:pPr>
+            <a:r>
+              <a:t>• 6,000 full lifecycle multi-variate telemetry records across 5 commercial engine variants (CFM56-7B, GE90-115B, Trent 1000, PW1100G, CF34-8E).</a:t>
+            </a:r>
+          </a:p>
+          <a:p>
+            <a:pPr>
+              <a:spcAft>
+                <a:spcPts val="400"/>
+              </a:spcAft>
+              <a:defRPr sz="1100">
+                <a:solidFill>
+                  <a:srgbClr val="F8FAFC"/>
+                </a:solidFill>
+              </a:defRPr>
+            </a:pPr>
+            <a:r>
+              <a:t>• Tracks continuous thermal, aerodynamic, and rotational sensor parameters from initial delivery to critical failure threshold.</a:t>
+            </a:r>
+          </a:p>
+        </p:txBody>
+      </p:sp>
+      <p:sp>
+        <p:nvSpPr>
+          <p:cNvPr id="6" name="Rounded Rectangle 5"/>
+          <p:cNvSpPr/>
+          <p:nvPr/>
+        </p:nvSpPr>
+        <p:spPr>
+          <a:xfrm>
+            <a:off x="6217920" y="1645920"/>
+            <a:ext cx="5120640" cy="4572000"/>
+          </a:xfrm>
+          <a:prstGeom prst="roundRect">
+            <a:avLst/>
+          </a:prstGeom>
+          <a:solidFill>
+            <a:srgbClr val="0A1830"/>
+          </a:solidFill>
+          <a:ln w="19050">
+            <a:solidFill>
+              <a:srgbClr val="2563EB"/>
+            </a:solidFill>
+          </a:ln>
+        </p:spPr>
+        <p:style>
+          <a:lnRef idx="1">
+            <a:schemeClr val="accent1"/>
+          </a:lnRef>
+          <a:fillRef idx="3">
+            <a:schemeClr val="accent1"/>
+          </a:fillRef>
+          <a:effectRef idx="2">
+            <a:schemeClr val="accent1"/>
+          </a:effectRef>
+          <a:fontRef idx="minor">
+            <a:schemeClr val="lt1"/>
+          </a:fontRef>
+        </p:style>
+        <p:txBody>
+          <a:bodyPr rtlCol="0" anchor="ctr"/>
+          <a:lstStyle/>
+          <a:p>
+            <a:pPr algn="ctr"/>
+          </a:p>
+        </p:txBody>
+      </p:sp>
+      <p:sp>
+        <p:nvSpPr>
+          <p:cNvPr id="7" name="TextBox 6"/>
+          <p:cNvSpPr txBox="1"/>
+          <p:nvPr/>
+        </p:nvSpPr>
+        <p:spPr>
+          <a:xfrm>
+            <a:off x="6400800" y="1828800"/>
+            <a:ext cx="4754879" cy="4206240"/>
+          </a:xfrm>
+          <a:prstGeom prst="rect">
+            <a:avLst/>
+          </a:prstGeom>
+          <a:noFill/>
+        </p:spPr>
+        <p:txBody>
+          <a:bodyPr wrap="square">
+            <a:spAutoFit/>
+          </a:bodyPr>
+          <a:lstStyle/>
+          <a:p>
+            <a:pPr>
+              <a:defRPr sz="1400" b="1">
+                <a:solidFill>
+                  <a:srgbClr val="38BDF8"/>
+                </a:solidFill>
+              </a:defRPr>
+            </a:pPr>
+            <a:r>
+              <a:t>Critical Engine Subsystems Monitored</a:t>
+            </a:r>
+          </a:p>
+          <a:p>
+            <a:pPr>
+              <a:spcAft>
+                <a:spcPts val="400"/>
+              </a:spcAft>
+              <a:defRPr sz="1100">
+                <a:solidFill>
+                  <a:srgbClr val="F8FAFC"/>
+                </a:solidFill>
+              </a:defRPr>
+            </a:pPr>
+            <a:r>
+              <a:t>• 1. High-Pressure Turbine (HPT) Blades: 4,200 max design cycles, thermal creep &amp; oxidation.</a:t>
+            </a:r>
+          </a:p>
+          <a:p>
+            <a:pPr>
+              <a:spcAft>
+                <a:spcPts val="400"/>
+              </a:spcAft>
+              <a:defRPr sz="1100">
+                <a:solidFill>
+                  <a:srgbClr val="F8FAFC"/>
+                </a:solidFill>
+              </a:defRPr>
+            </a:pPr>
+            <a:r>
+              <a:t>• 2. High-Pressure Compressor (HPC) Rotor: 6,000 max design cycles, high-cycle fatigue.</a:t>
+            </a:r>
+          </a:p>
+          <a:p>
+            <a:pPr>
+              <a:spcAft>
+                <a:spcPts val="400"/>
+              </a:spcAft>
+              <a:defRPr sz="1100">
+                <a:solidFill>
+                  <a:srgbClr val="F8FAFC"/>
+                </a:solidFill>
+              </a:defRPr>
+            </a:pPr>
+            <a:r>
+              <a:t>• 3. Mainshaft Roller Bearings (#4 Bearing): 5,500 max design cycles, subsurface shear spallation.</a:t>
+            </a:r>
+          </a:p>
+          <a:p>
+            <a:pPr>
+              <a:spcAft>
+                <a:spcPts val="400"/>
+              </a:spcAft>
+              <a:defRPr sz="1100">
+                <a:solidFill>
+                  <a:srgbClr val="F8FAFC"/>
+                </a:solidFill>
+              </a:defRPr>
+            </a:pPr>
+            <a:r>
+              <a:t>• 4. Fuel Metering Unit (FMU): 8,500 max design cycles, servo-valve sticking &amp; orifice erosion.</a:t>
+            </a:r>
+          </a:p>
+          <a:p>
+            <a:pPr>
+              <a:spcAft>
+                <a:spcPts val="400"/>
+              </a:spcAft>
+              <a:defRPr sz="1100">
+                <a:solidFill>
+                  <a:srgbClr val="F8FAFC"/>
+                </a:solidFill>
+              </a:defRPr>
+            </a:pPr>
+            <a:r>
+              <a:t>• 5. Low-Pressure Turbine (LPT) Stator: 7,200 max design cycles, TBC thermal barrier delamination.</a:t>
             </a:r>
           </a:p>
         </p:txBody>
@@ -3695,13 +6137,13 @@
         <p:spPr>
           <a:xfrm>
             <a:off x="0" y="0"/>
-            <a:ext cx="12191695" cy="1097280"/>
+            <a:ext cx="12191695" cy="6858000"/>
           </a:xfrm>
           <a:prstGeom prst="rect">
             <a:avLst/>
           </a:prstGeom>
           <a:solidFill>
-            <a:srgbClr val="0F172A"/>
+            <a:srgbClr val="050D1A"/>
           </a:solidFill>
           <a:ln>
             <a:noFill/>
@@ -3737,8 +6179,8 @@
         </p:nvSpPr>
         <p:spPr>
           <a:xfrm>
-            <a:off x="731520" y="137160"/>
-            <a:ext cx="10698480" cy="822960"/>
+            <a:off x="731520" y="365760"/>
+            <a:ext cx="10728655" cy="1005840"/>
           </a:xfrm>
           <a:prstGeom prst="rect">
             <a:avLst/>
@@ -3752,40 +6194,85 @@
           <a:lstStyle/>
           <a:p>
             <a:pPr>
-              <a:defRPr sz="2400" b="1">
-                <a:solidFill>
-                  <a:srgbClr val="FFFFFF"/>
-                </a:solidFill>
-              </a:defRPr>
-            </a:pPr>
-            <a:r>
-              <a:t>3. System Architecture &amp; Workflow Pipeline</a:t>
-            </a:r>
-          </a:p>
-          <a:p>
-            <a:pPr>
-              <a:defRPr sz="1100">
-                <a:solidFill>
-                  <a:srgbClr val="94A3B8"/>
-                </a:solidFill>
-              </a:defRPr>
-            </a:pPr>
-            <a:r>
-              <a:t>Academic &amp; Industrial AI Project Series  |  Project 33 of 55</a:t>
-            </a:r>
-          </a:p>
-        </p:txBody>
-      </p:sp>
-      <p:sp>
-        <p:nvSpPr>
-          <p:cNvPr id="4" name="TextBox 3"/>
+              <a:defRPr sz="1100" b="1">
+                <a:solidFill>
+                  <a:srgbClr val="38BDF8"/>
+                </a:solidFill>
+              </a:defRPr>
+            </a:pPr>
+            <a:r>
+              <a:t>AEROSPACE PREDICTIVE TELEMETRY • PROJECT-033</a:t>
+            </a:r>
+          </a:p>
+          <a:p>
+            <a:pPr>
+              <a:defRPr sz="2200" b="1">
+                <a:solidFill>
+                  <a:srgbClr val="F8FAFC"/>
+                </a:solidFill>
+              </a:defRPr>
+            </a:pPr>
+            <a:r>
+              <a:t>Multi-Sensor Kinematic Telemetry Array</a:t>
+            </a:r>
+          </a:p>
+        </p:txBody>
+      </p:sp>
+      <p:sp>
+        <p:nvSpPr>
+          <p:cNvPr id="4" name="Rounded Rectangle 3"/>
+          <p:cNvSpPr/>
+          <p:nvPr/>
+        </p:nvSpPr>
+        <p:spPr>
+          <a:xfrm>
+            <a:off x="731520" y="1645920"/>
+            <a:ext cx="3291840" cy="4572000"/>
+          </a:xfrm>
+          <a:prstGeom prst="roundRect">
+            <a:avLst/>
+          </a:prstGeom>
+          <a:solidFill>
+            <a:srgbClr val="0A1830"/>
+          </a:solidFill>
+          <a:ln w="19050">
+            <a:solidFill>
+              <a:srgbClr val="38BDF8"/>
+            </a:solidFill>
+          </a:ln>
+        </p:spPr>
+        <p:style>
+          <a:lnRef idx="1">
+            <a:schemeClr val="accent1"/>
+          </a:lnRef>
+          <a:fillRef idx="3">
+            <a:schemeClr val="accent1"/>
+          </a:fillRef>
+          <a:effectRef idx="2">
+            <a:schemeClr val="accent1"/>
+          </a:effectRef>
+          <a:fontRef idx="minor">
+            <a:schemeClr val="lt1"/>
+          </a:fontRef>
+        </p:style>
+        <p:txBody>
+          <a:bodyPr rtlCol="0" anchor="ctr"/>
+          <a:lstStyle/>
+          <a:p>
+            <a:pPr algn="ctr"/>
+          </a:p>
+        </p:txBody>
+      </p:sp>
+      <p:sp>
+        <p:nvSpPr>
+          <p:cNvPr id="5" name="TextBox 4"/>
           <p:cNvSpPr txBox="1"/>
           <p:nvPr/>
         </p:nvSpPr>
         <p:spPr>
           <a:xfrm>
-            <a:off x="731520" y="1371600"/>
-            <a:ext cx="10698480" cy="5029200"/>
+            <a:off x="914400" y="1828800"/>
+            <a:ext cx="2926080" cy="4206240"/>
           </a:xfrm>
           <a:prstGeom prst="rect">
             <a:avLst/>
@@ -3799,137 +6286,309 @@
           <a:lstStyle/>
           <a:p>
             <a:pPr>
-              <a:spcBef>
-                <a:spcPts val="800"/>
-              </a:spcBef>
-              <a:defRPr sz="1500" b="1">
-                <a:solidFill>
-                  <a:srgbClr val="2563EB"/>
-                </a:solidFill>
-              </a:defRPr>
-            </a:pPr>
-            <a:r>
-              <a:t>[1] Ingestion Layer</a:t>
-            </a:r>
-          </a:p>
-          <a:p>
-            <a:pPr>
-              <a:defRPr sz="1300">
-                <a:solidFill>
-                  <a:srgbClr val="475569"/>
-                </a:solidFill>
-              </a:defRPr>
-            </a:pPr>
-            <a:r>
-              <a:t>Raw telemetry, video feeds, or structured tabular features ingested via secure endpoints.</a:t>
-            </a:r>
-          </a:p>
-          <a:p>
-            <a:pPr>
-              <a:spcBef>
-                <a:spcPts val="800"/>
-              </a:spcBef>
-              <a:defRPr sz="1500" b="1">
-                <a:solidFill>
-                  <a:srgbClr val="2563EB"/>
-                </a:solidFill>
-              </a:defRPr>
-            </a:pPr>
-            <a:r>
-              <a:t>[2] Preprocessing &amp; Normalization</a:t>
-            </a:r>
-          </a:p>
-          <a:p>
-            <a:pPr>
-              <a:defRPr sz="1300">
-                <a:solidFill>
-                  <a:srgbClr val="475569"/>
-                </a:solidFill>
-              </a:defRPr>
-            </a:pPr>
-            <a:r>
-              <a:t>Feature scaling, missing value imputation, winsorization, and tensor reshaping.</a:t>
-            </a:r>
-          </a:p>
-          <a:p>
-            <a:pPr>
-              <a:spcBef>
-                <a:spcPts val="800"/>
-              </a:spcBef>
-              <a:defRPr sz="1500" b="1">
-                <a:solidFill>
-                  <a:srgbClr val="2563EB"/>
-                </a:solidFill>
-              </a:defRPr>
-            </a:pPr>
-            <a:r>
-              <a:t>[3] Deep Neural Inference Engine</a:t>
-            </a:r>
-          </a:p>
-          <a:p>
-            <a:pPr>
-              <a:defRPr sz="1300">
-                <a:solidFill>
-                  <a:srgbClr val="475569"/>
-                </a:solidFill>
-              </a:defRPr>
-            </a:pPr>
-            <a:r>
-              <a:t>Optimized model evaluating representations with GPU/MPS/CPU acceleration.</a:t>
-            </a:r>
-          </a:p>
-          <a:p>
-            <a:pPr>
-              <a:spcBef>
-                <a:spcPts val="800"/>
-              </a:spcBef>
-              <a:defRPr sz="1500" b="1">
-                <a:solidFill>
-                  <a:srgbClr val="2563EB"/>
-                </a:solidFill>
-              </a:defRPr>
-            </a:pPr>
-            <a:r>
-              <a:t>[4] Post-Processing &amp; Decision Support</a:t>
-            </a:r>
-          </a:p>
-          <a:p>
-            <a:pPr>
-              <a:defRPr sz="1300">
-                <a:solidFill>
-                  <a:srgbClr val="475569"/>
-                </a:solidFill>
-              </a:defRPr>
-            </a:pPr>
-            <a:r>
-              <a:t>Threshold calibration, confidence scoring, classification/regression output formatting.</a:t>
-            </a:r>
-          </a:p>
-          <a:p>
-            <a:pPr>
-              <a:spcBef>
-                <a:spcPts val="800"/>
-              </a:spcBef>
-              <a:defRPr sz="1500" b="1">
-                <a:solidFill>
-                  <a:srgbClr val="2563EB"/>
-                </a:solidFill>
-              </a:defRPr>
-            </a:pPr>
-            <a:r>
-              <a:t>[5] Visualization &amp; Persistence</a:t>
-            </a:r>
-          </a:p>
-          <a:p>
-            <a:pPr>
-              <a:defRPr sz="1300">
-                <a:solidFill>
-                  <a:srgbClr val="475569"/>
-                </a:solidFill>
-              </a:defRPr>
-            </a:pPr>
-            <a:r>
-              <a:t>Interactive UI dashboard rendering metrics and SQLite/PostgreSQL audit logging.</a:t>
+              <a:defRPr sz="1400" b="1">
+                <a:solidFill>
+                  <a:srgbClr val="38BDF8"/>
+                </a:solidFill>
+              </a:defRPr>
+            </a:pPr>
+            <a:r>
+              <a:t>Thermal &amp; Aerodynamic Telemetry</a:t>
+            </a:r>
+          </a:p>
+          <a:p>
+            <a:pPr>
+              <a:spcAft>
+                <a:spcPts val="400"/>
+              </a:spcAft>
+              <a:defRPr sz="1100">
+                <a:solidFill>
+                  <a:srgbClr val="F8FAFC"/>
+                </a:solidFill>
+              </a:defRPr>
+            </a:pPr>
+            <a:r>
+              <a:t>• T50 LPT Exit Temp: Exhaust gas temperature creep (nominal 1,120°R to 1,600°R).</a:t>
+            </a:r>
+          </a:p>
+          <a:p>
+            <a:pPr>
+              <a:spcAft>
+                <a:spcPts val="400"/>
+              </a:spcAft>
+              <a:defRPr sz="1100">
+                <a:solidFill>
+                  <a:srgbClr val="F8FAFC"/>
+                </a:solidFill>
+              </a:defRPr>
+            </a:pPr>
+            <a:r>
+              <a:t>• P30 HPC Discharge Static Pressure: Compressor efficiency metric (45 to 1,200 psia).</a:t>
+            </a:r>
+          </a:p>
+          <a:p>
+            <a:pPr>
+              <a:spcAft>
+                <a:spcPts val="400"/>
+              </a:spcAft>
+              <a:defRPr sz="1100">
+                <a:solidFill>
+                  <a:srgbClr val="F8FAFC"/>
+                </a:solidFill>
+              </a:defRPr>
+            </a:pPr>
+            <a:r>
+              <a:t>• EGT Margin (°C): Safety buffer against turbine over-temperature exceedance (nominal +85°C down to -12°C).</a:t>
+            </a:r>
+          </a:p>
+        </p:txBody>
+      </p:sp>
+      <p:sp>
+        <p:nvSpPr>
+          <p:cNvPr id="6" name="Rounded Rectangle 5"/>
+          <p:cNvSpPr/>
+          <p:nvPr/>
+        </p:nvSpPr>
+        <p:spPr>
+          <a:xfrm>
+            <a:off x="4389120" y="1645920"/>
+            <a:ext cx="3291840" cy="4572000"/>
+          </a:xfrm>
+          <a:prstGeom prst="roundRect">
+            <a:avLst/>
+          </a:prstGeom>
+          <a:solidFill>
+            <a:srgbClr val="0A1830"/>
+          </a:solidFill>
+          <a:ln w="19050">
+            <a:solidFill>
+              <a:srgbClr val="2563EB"/>
+            </a:solidFill>
+          </a:ln>
+        </p:spPr>
+        <p:style>
+          <a:lnRef idx="1">
+            <a:schemeClr val="accent1"/>
+          </a:lnRef>
+          <a:fillRef idx="3">
+            <a:schemeClr val="accent1"/>
+          </a:fillRef>
+          <a:effectRef idx="2">
+            <a:schemeClr val="accent1"/>
+          </a:effectRef>
+          <a:fontRef idx="minor">
+            <a:schemeClr val="lt1"/>
+          </a:fontRef>
+        </p:style>
+        <p:txBody>
+          <a:bodyPr rtlCol="0" anchor="ctr"/>
+          <a:lstStyle/>
+          <a:p>
+            <a:pPr algn="ctr"/>
+          </a:p>
+        </p:txBody>
+      </p:sp>
+      <p:sp>
+        <p:nvSpPr>
+          <p:cNvPr id="7" name="TextBox 6"/>
+          <p:cNvSpPr txBox="1"/>
+          <p:nvPr/>
+        </p:nvSpPr>
+        <p:spPr>
+          <a:xfrm>
+            <a:off x="4572000" y="1828800"/>
+            <a:ext cx="2926080" cy="4206240"/>
+          </a:xfrm>
+          <a:prstGeom prst="rect">
+            <a:avLst/>
+          </a:prstGeom>
+          <a:noFill/>
+        </p:spPr>
+        <p:txBody>
+          <a:bodyPr wrap="square">
+            <a:spAutoFit/>
+          </a:bodyPr>
+          <a:lstStyle/>
+          <a:p>
+            <a:pPr>
+              <a:defRPr sz="1400" b="1">
+                <a:solidFill>
+                  <a:srgbClr val="38BDF8"/>
+                </a:solidFill>
+              </a:defRPr>
+            </a:pPr>
+            <a:r>
+              <a:t>Rotational &amp; Flow Dynamics</a:t>
+            </a:r>
+          </a:p>
+          <a:p>
+            <a:pPr>
+              <a:spcAft>
+                <a:spcPts val="400"/>
+              </a:spcAft>
+              <a:defRPr sz="1100">
+                <a:solidFill>
+                  <a:srgbClr val="F8FAFC"/>
+                </a:solidFill>
+              </a:defRPr>
+            </a:pPr>
+            <a:r>
+              <a:t>• Nc High-Pressure Core Speed: Spool speed increases with wear (8,800 to 9,800 RPM).</a:t>
+            </a:r>
+          </a:p>
+          <a:p>
+            <a:pPr>
+              <a:spcAft>
+                <a:spcPts val="400"/>
+              </a:spcAft>
+              <a:defRPr sz="1100">
+                <a:solidFill>
+                  <a:srgbClr val="F8FAFC"/>
+                </a:solidFill>
+              </a:defRPr>
+            </a:pPr>
+            <a:r>
+              <a:t>• Nf Low-Pressure Fan Speed: Baseline thrust regulation metric (2,200 to 2,600 RPM).</a:t>
+            </a:r>
+          </a:p>
+          <a:p>
+            <a:pPr>
+              <a:spcAft>
+                <a:spcPts val="400"/>
+              </a:spcAft>
+              <a:defRPr sz="1100">
+                <a:solidFill>
+                  <a:srgbClr val="F8FAFC"/>
+                </a:solidFill>
+              </a:defRPr>
+            </a:pPr>
+            <a:r>
+              <a:t>• Fuel Flow Ratio (pps/psia): Specific fuel consumption degradation (+15% at end-of-life).</a:t>
+            </a:r>
+          </a:p>
+        </p:txBody>
+      </p:sp>
+      <p:sp>
+        <p:nvSpPr>
+          <p:cNvPr id="8" name="Rounded Rectangle 7"/>
+          <p:cNvSpPr/>
+          <p:nvPr/>
+        </p:nvSpPr>
+        <p:spPr>
+          <a:xfrm>
+            <a:off x="8046720" y="1645920"/>
+            <a:ext cx="3291840" cy="4572000"/>
+          </a:xfrm>
+          <a:prstGeom prst="roundRect">
+            <a:avLst/>
+          </a:prstGeom>
+          <a:solidFill>
+            <a:srgbClr val="0A1830"/>
+          </a:solidFill>
+          <a:ln w="19050">
+            <a:solidFill>
+              <a:srgbClr val="F59E0B"/>
+            </a:solidFill>
+          </a:ln>
+        </p:spPr>
+        <p:style>
+          <a:lnRef idx="1">
+            <a:schemeClr val="accent1"/>
+          </a:lnRef>
+          <a:fillRef idx="3">
+            <a:schemeClr val="accent1"/>
+          </a:fillRef>
+          <a:effectRef idx="2">
+            <a:schemeClr val="accent1"/>
+          </a:effectRef>
+          <a:fontRef idx="minor">
+            <a:schemeClr val="lt1"/>
+          </a:fontRef>
+        </p:style>
+        <p:txBody>
+          <a:bodyPr rtlCol="0" anchor="ctr"/>
+          <a:lstStyle/>
+          <a:p>
+            <a:pPr algn="ctr"/>
+          </a:p>
+        </p:txBody>
+      </p:sp>
+      <p:sp>
+        <p:nvSpPr>
+          <p:cNvPr id="9" name="TextBox 8"/>
+          <p:cNvSpPr txBox="1"/>
+          <p:nvPr/>
+        </p:nvSpPr>
+        <p:spPr>
+          <a:xfrm>
+            <a:off x="8229600" y="1828800"/>
+            <a:ext cx="2926080" cy="4206240"/>
+          </a:xfrm>
+          <a:prstGeom prst="rect">
+            <a:avLst/>
+          </a:prstGeom>
+          <a:noFill/>
+        </p:spPr>
+        <p:txBody>
+          <a:bodyPr wrap="square">
+            <a:spAutoFit/>
+          </a:bodyPr>
+          <a:lstStyle/>
+          <a:p>
+            <a:pPr>
+              <a:defRPr sz="1400" b="1">
+                <a:solidFill>
+                  <a:srgbClr val="38BDF8"/>
+                </a:solidFill>
+              </a:defRPr>
+            </a:pPr>
+            <a:r>
+              <a:t>Vibration &amp; Acoustic Stress</a:t>
+            </a:r>
+          </a:p>
+          <a:p>
+            <a:pPr>
+              <a:spcAft>
+                <a:spcPts val="400"/>
+              </a:spcAft>
+              <a:defRPr sz="1100">
+                <a:solidFill>
+                  <a:srgbClr val="F8FAFC"/>
+                </a:solidFill>
+              </a:defRPr>
+            </a:pPr>
+            <a:r>
+              <a:t>• Vibration Broadband (g RMS): Accelerometer broadband spectrum (0.35g to 3.8g RMS).</a:t>
+            </a:r>
+          </a:p>
+          <a:p>
+            <a:pPr>
+              <a:spcAft>
+                <a:spcPts val="400"/>
+              </a:spcAft>
+              <a:defRPr sz="1100">
+                <a:solidFill>
+                  <a:srgbClr val="F8FAFC"/>
+                </a:solidFill>
+              </a:defRPr>
+            </a:pPr>
+            <a:r>
+              <a:t>• Cycle Ratio: Completed cycles / design limits with exponential Weibull wear compounding.</a:t>
+            </a:r>
+          </a:p>
+          <a:p>
+            <a:pPr>
+              <a:spcAft>
+                <a:spcPts val="400"/>
+              </a:spcAft>
+              <a:defRPr sz="1100">
+                <a:solidFill>
+                  <a:srgbClr val="F8FAFC"/>
+                </a:solidFill>
+              </a:defRPr>
+            </a:pPr>
+            <a:r>
+              <a:t>• Continuous 8-dimensional normalization pipeline with min-max scaling tensors.</a:t>
             </a:r>
           </a:p>
         </p:txBody>
@@ -3961,13 +6620,13 @@
         <p:spPr>
           <a:xfrm>
             <a:off x="0" y="0"/>
-            <a:ext cx="12191695" cy="1097280"/>
+            <a:ext cx="12191695" cy="6858000"/>
           </a:xfrm>
           <a:prstGeom prst="rect">
             <a:avLst/>
           </a:prstGeom>
           <a:solidFill>
-            <a:srgbClr val="0F172A"/>
+            <a:srgbClr val="050D1A"/>
           </a:solidFill>
           <a:ln>
             <a:noFill/>
@@ -4003,8 +6662,8 @@
         </p:nvSpPr>
         <p:spPr>
           <a:xfrm>
-            <a:off x="731520" y="137160"/>
-            <a:ext cx="10698480" cy="822960"/>
+            <a:off x="731520" y="365760"/>
+            <a:ext cx="10728655" cy="1005840"/>
           </a:xfrm>
           <a:prstGeom prst="rect">
             <a:avLst/>
@@ -4018,40 +6677,85 @@
           <a:lstStyle/>
           <a:p>
             <a:pPr>
-              <a:defRPr sz="2400" b="1">
-                <a:solidFill>
-                  <a:srgbClr val="FFFFFF"/>
-                </a:solidFill>
-              </a:defRPr>
-            </a:pPr>
-            <a:r>
-              <a:t>4. Deep Learning &amp; ML Methodology</a:t>
-            </a:r>
-          </a:p>
-          <a:p>
-            <a:pPr>
-              <a:defRPr sz="1100">
-                <a:solidFill>
-                  <a:srgbClr val="94A3B8"/>
-                </a:solidFill>
-              </a:defRPr>
-            </a:pPr>
-            <a:r>
-              <a:t>Academic &amp; Industrial AI Project Series  |  Project 33 of 55</a:t>
-            </a:r>
-          </a:p>
-        </p:txBody>
-      </p:sp>
-      <p:sp>
-        <p:nvSpPr>
-          <p:cNvPr id="4" name="TextBox 3"/>
+              <a:defRPr sz="1100" b="1">
+                <a:solidFill>
+                  <a:srgbClr val="38BDF8"/>
+                </a:solidFill>
+              </a:defRPr>
+            </a:pPr>
+            <a:r>
+              <a:t>AEROSPACE PREDICTIVE TELEMETRY • PROJECT-033</a:t>
+            </a:r>
+          </a:p>
+          <a:p>
+            <a:pPr>
+              <a:defRPr sz="2200" b="1">
+                <a:solidFill>
+                  <a:srgbClr val="F8FAFC"/>
+                </a:solidFill>
+              </a:defRPr>
+            </a:pPr>
+            <a:r>
+              <a:t>Deep Residual Airworthiness Classifier Architecture</a:t>
+            </a:r>
+          </a:p>
+        </p:txBody>
+      </p:sp>
+      <p:sp>
+        <p:nvSpPr>
+          <p:cNvPr id="4" name="Rounded Rectangle 3"/>
+          <p:cNvSpPr/>
+          <p:nvPr/>
+        </p:nvSpPr>
+        <p:spPr>
+          <a:xfrm>
+            <a:off x="731520" y="1645920"/>
+            <a:ext cx="5120640" cy="4572000"/>
+          </a:xfrm>
+          <a:prstGeom prst="roundRect">
+            <a:avLst/>
+          </a:prstGeom>
+          <a:solidFill>
+            <a:srgbClr val="0A1830"/>
+          </a:solidFill>
+          <a:ln w="19050">
+            <a:solidFill>
+              <a:srgbClr val="38BDF8"/>
+            </a:solidFill>
+          </a:ln>
+        </p:spPr>
+        <p:style>
+          <a:lnRef idx="1">
+            <a:schemeClr val="accent1"/>
+          </a:lnRef>
+          <a:fillRef idx="3">
+            <a:schemeClr val="accent1"/>
+          </a:fillRef>
+          <a:effectRef idx="2">
+            <a:schemeClr val="accent1"/>
+          </a:effectRef>
+          <a:fontRef idx="minor">
+            <a:schemeClr val="lt1"/>
+          </a:fontRef>
+        </p:style>
+        <p:txBody>
+          <a:bodyPr rtlCol="0" anchor="ctr"/>
+          <a:lstStyle/>
+          <a:p>
+            <a:pPr algn="ctr"/>
+          </a:p>
+        </p:txBody>
+      </p:sp>
+      <p:sp>
+        <p:nvSpPr>
+          <p:cNvPr id="5" name="TextBox 4"/>
           <p:cNvSpPr txBox="1"/>
           <p:nvPr/>
         </p:nvSpPr>
         <p:spPr>
           <a:xfrm>
-            <a:off x="731520" y="1371600"/>
-            <a:ext cx="10698480" cy="5029200"/>
+            <a:off x="914400" y="1828800"/>
+            <a:ext cx="4754879" cy="4206240"/>
           </a:xfrm>
           <a:prstGeom prst="rect">
             <a:avLst/>
@@ -4065,110 +6769,229 @@
           <a:lstStyle/>
           <a:p>
             <a:pPr>
-              <a:spcBef>
-                <a:spcPts val="800"/>
-              </a:spcBef>
-              <a:defRPr sz="1500" b="1">
-                <a:solidFill>
-                  <a:srgbClr val="0F172A"/>
-                </a:solidFill>
-              </a:defRPr>
-            </a:pPr>
-            <a:r>
-              <a:t>• Feature Engineering &amp; Dimensionality Alignment</a:t>
-            </a:r>
-          </a:p>
-          <a:p>
-            <a:pPr>
-              <a:defRPr sz="1300">
-                <a:solidFill>
-                  <a:srgbClr val="475569"/>
-                </a:solidFill>
-              </a:defRPr>
-            </a:pPr>
-            <a:r>
-              <a:t>Domain-specific feature extraction, temporal windowing, and embedding vectors.</a:t>
-            </a:r>
-          </a:p>
-          <a:p>
-            <a:pPr>
-              <a:spcBef>
-                <a:spcPts val="800"/>
-              </a:spcBef>
-              <a:defRPr sz="1500" b="1">
-                <a:solidFill>
-                  <a:srgbClr val="0F172A"/>
-                </a:solidFill>
-              </a:defRPr>
-            </a:pPr>
-            <a:r>
-              <a:t>• Model Family &amp; Optimization</a:t>
-            </a:r>
-          </a:p>
-          <a:p>
-            <a:pPr>
-              <a:defRPr sz="1300">
-                <a:solidFill>
-                  <a:srgbClr val="475569"/>
-                </a:solidFill>
-              </a:defRPr>
-            </a:pPr>
-            <a:r>
-              <a:t>Ensemble gradient boosting or deep neural networks trained with AdamW and adaptive LR scheduling.</a:t>
-            </a:r>
-          </a:p>
-          <a:p>
-            <a:pPr>
-              <a:spcBef>
-                <a:spcPts val="800"/>
-              </a:spcBef>
-              <a:defRPr sz="1500" b="1">
-                <a:solidFill>
-                  <a:srgbClr val="0F172A"/>
-                </a:solidFill>
-              </a:defRPr>
-            </a:pPr>
-            <a:r>
-              <a:t>• Overfitting Mitigation</a:t>
-            </a:r>
-          </a:p>
-          <a:p>
-            <a:pPr>
-              <a:defRPr sz="1300">
-                <a:solidFill>
-                  <a:srgbClr val="475569"/>
-                </a:solidFill>
-              </a:defRPr>
-            </a:pPr>
-            <a:r>
-              <a:t>Stratified k-fold cross-validation, dropout layers, early stopping, and data augmentation.</a:t>
-            </a:r>
-          </a:p>
-          <a:p>
-            <a:pPr>
-              <a:spcBef>
-                <a:spcPts val="800"/>
-              </a:spcBef>
-              <a:defRPr sz="1500" b="1">
-                <a:solidFill>
-                  <a:srgbClr val="0F172A"/>
-                </a:solidFill>
-              </a:defRPr>
-            </a:pPr>
-            <a:r>
-              <a:t>• Explainability &amp; Auditability</a:t>
-            </a:r>
-          </a:p>
-          <a:p>
-            <a:pPr>
-              <a:defRPr sz="1300">
-                <a:solidFill>
-                  <a:srgbClr val="475569"/>
-                </a:solidFill>
-              </a:defRPr>
-            </a:pPr>
-            <a:r>
-              <a:t>Confidence scores and feature importance attributions for high-stakes decisions.</a:t>
+              <a:defRPr sz="1400" b="1">
+                <a:solidFill>
+                  <a:srgbClr val="38BDF8"/>
+                </a:solidFill>
+              </a:defRPr>
+            </a:pPr>
+            <a:r>
+              <a:t>AviationAirworthinessClassifierNet</a:t>
+            </a:r>
+          </a:p>
+          <a:p>
+            <a:pPr>
+              <a:spcAft>
+                <a:spcPts val="400"/>
+              </a:spcAft>
+              <a:defRPr sz="1100">
+                <a:solidFill>
+                  <a:srgbClr val="F8FAFC"/>
+                </a:solidFill>
+              </a:defRPr>
+            </a:pPr>
+            <a:r>
+              <a:t>• Input: 8-dimensional normalized C-MAPSS physical sensor vector.</a:t>
+            </a:r>
+          </a:p>
+          <a:p>
+            <a:pPr>
+              <a:spcAft>
+                <a:spcPts val="400"/>
+              </a:spcAft>
+              <a:defRPr sz="1100">
+                <a:solidFill>
+                  <a:srgbClr val="F8FAFC"/>
+                </a:solidFill>
+              </a:defRPr>
+            </a:pPr>
+            <a:r>
+              <a:t>• Input Projection: Linear(8, 64) -&gt; BatchNorm1d -&gt; GELU activation.</a:t>
+            </a:r>
+          </a:p>
+          <a:p>
+            <a:pPr>
+              <a:spcAft>
+                <a:spcPts val="400"/>
+              </a:spcAft>
+              <a:defRPr sz="1100">
+                <a:solidFill>
+                  <a:srgbClr val="F8FAFC"/>
+                </a:solidFill>
+              </a:defRPr>
+            </a:pPr>
+            <a:r>
+              <a:t>• Residual Block 1: Linear(64, 64) -&gt; BatchNorm -&gt; GELU -&gt; Dropout(0.15) -&gt; Linear(64, 64) -&gt; Skip Connection.</a:t>
+            </a:r>
+          </a:p>
+          <a:p>
+            <a:pPr>
+              <a:spcAft>
+                <a:spcPts val="400"/>
+              </a:spcAft>
+              <a:defRPr sz="1100">
+                <a:solidFill>
+                  <a:srgbClr val="F8FAFC"/>
+                </a:solidFill>
+              </a:defRPr>
+            </a:pPr>
+            <a:r>
+              <a:t>• Residual Block 2: Deep feature extraction with gradient highway stabilization.</a:t>
+            </a:r>
+          </a:p>
+          <a:p>
+            <a:pPr>
+              <a:spcAft>
+                <a:spcPts val="400"/>
+              </a:spcAft>
+              <a:defRPr sz="1100">
+                <a:solidFill>
+                  <a:srgbClr val="F8FAFC"/>
+                </a:solidFill>
+              </a:defRPr>
+            </a:pPr>
+            <a:r>
+              <a:t>• Classification Head: Linear(64, 32) -&gt; GELU -&gt; Linear(32, 3) logits.</a:t>
+            </a:r>
+          </a:p>
+        </p:txBody>
+      </p:sp>
+      <p:sp>
+        <p:nvSpPr>
+          <p:cNvPr id="6" name="Rounded Rectangle 5"/>
+          <p:cNvSpPr/>
+          <p:nvPr/>
+        </p:nvSpPr>
+        <p:spPr>
+          <a:xfrm>
+            <a:off x="6217920" y="1645920"/>
+            <a:ext cx="5120640" cy="4572000"/>
+          </a:xfrm>
+          <a:prstGeom prst="roundRect">
+            <a:avLst/>
+          </a:prstGeom>
+          <a:solidFill>
+            <a:srgbClr val="0A1830"/>
+          </a:solidFill>
+          <a:ln w="19050">
+            <a:solidFill>
+              <a:srgbClr val="10B981"/>
+            </a:solidFill>
+          </a:ln>
+        </p:spPr>
+        <p:style>
+          <a:lnRef idx="1">
+            <a:schemeClr val="accent1"/>
+          </a:lnRef>
+          <a:fillRef idx="3">
+            <a:schemeClr val="accent1"/>
+          </a:fillRef>
+          <a:effectRef idx="2">
+            <a:schemeClr val="accent1"/>
+          </a:effectRef>
+          <a:fontRef idx="minor">
+            <a:schemeClr val="lt1"/>
+          </a:fontRef>
+        </p:style>
+        <p:txBody>
+          <a:bodyPr rtlCol="0" anchor="ctr"/>
+          <a:lstStyle/>
+          <a:p>
+            <a:pPr algn="ctr"/>
+          </a:p>
+        </p:txBody>
+      </p:sp>
+      <p:sp>
+        <p:nvSpPr>
+          <p:cNvPr id="7" name="TextBox 6"/>
+          <p:cNvSpPr txBox="1"/>
+          <p:nvPr/>
+        </p:nvSpPr>
+        <p:spPr>
+          <a:xfrm>
+            <a:off x="6400800" y="1828800"/>
+            <a:ext cx="4754879" cy="4206240"/>
+          </a:xfrm>
+          <a:prstGeom prst="rect">
+            <a:avLst/>
+          </a:prstGeom>
+          <a:noFill/>
+        </p:spPr>
+        <p:txBody>
+          <a:bodyPr wrap="square">
+            <a:spAutoFit/>
+          </a:bodyPr>
+          <a:lstStyle/>
+          <a:p>
+            <a:pPr>
+              <a:defRPr sz="1400" b="1">
+                <a:solidFill>
+                  <a:srgbClr val="38BDF8"/>
+                </a:solidFill>
+              </a:defRPr>
+            </a:pPr>
+            <a:r>
+              <a:t>Three-Tier Airworthiness Hierarchy</a:t>
+            </a:r>
+          </a:p>
+          <a:p>
+            <a:pPr>
+              <a:spcAft>
+                <a:spcPts val="400"/>
+              </a:spcAft>
+              <a:defRPr sz="1100">
+                <a:solidFill>
+                  <a:srgbClr val="F8FAFC"/>
+                </a:solidFill>
+              </a:defRPr>
+            </a:pPr>
+            <a:r>
+              <a:t>• Class 0: AIRWORTHY / OPTIMAL (Health &gt;= 60%) - Normal line operations.</a:t>
+            </a:r>
+          </a:p>
+          <a:p>
+            <a:pPr>
+              <a:spcAft>
+                <a:spcPts val="400"/>
+              </a:spcAft>
+              <a:defRPr sz="1100">
+                <a:solidFill>
+                  <a:srgbClr val="F8FAFC"/>
+                </a:solidFill>
+              </a:defRPr>
+            </a:pPr>
+            <a:r>
+              <a:t>• Class 1: MAINTENANCE DUE SOON (30% &lt;= Health &lt; 60%) - Schedule borescope within 75 cycles.</a:t>
+            </a:r>
+          </a:p>
+          <a:p>
+            <a:pPr>
+              <a:spcAft>
+                <a:spcPts val="400"/>
+              </a:spcAft>
+              <a:defRPr sz="1100">
+                <a:solidFill>
+                  <a:srgbClr val="F8FAFC"/>
+                </a:solidFill>
+              </a:defRPr>
+            </a:pPr>
+            <a:r>
+              <a:t>• Class 2: GROUNDED / MANDATORY SHOP VISIT (Health &lt; 30%) - Immediate teardown &amp; AOG directive.</a:t>
+            </a:r>
+          </a:p>
+          <a:p>
+            <a:pPr>
+              <a:spcAft>
+                <a:spcPts val="400"/>
+              </a:spcAft>
+              <a:defRPr sz="1100">
+                <a:solidFill>
+                  <a:srgbClr val="F8FAFC"/>
+                </a:solidFill>
+              </a:defRPr>
+            </a:pPr>
+            <a:r>
+              <a:t>• Cross-Entropy Loss optimization with AdamW &amp; Cosine Annealing learning rate schedule.</a:t>
             </a:r>
           </a:p>
         </p:txBody>
@@ -4200,13 +7023,13 @@
         <p:spPr>
           <a:xfrm>
             <a:off x="0" y="0"/>
-            <a:ext cx="12191695" cy="1097280"/>
+            <a:ext cx="12191695" cy="6858000"/>
           </a:xfrm>
           <a:prstGeom prst="rect">
             <a:avLst/>
           </a:prstGeom>
           <a:solidFill>
-            <a:srgbClr val="0F172A"/>
+            <a:srgbClr val="050D1A"/>
           </a:solidFill>
           <a:ln>
             <a:noFill/>
@@ -4242,8 +7065,8 @@
         </p:nvSpPr>
         <p:spPr>
           <a:xfrm>
-            <a:off x="731520" y="137160"/>
-            <a:ext cx="10698480" cy="822960"/>
+            <a:off x="731520" y="365760"/>
+            <a:ext cx="10728655" cy="1005840"/>
           </a:xfrm>
           <a:prstGeom prst="rect">
             <a:avLst/>
@@ -4257,40 +7080,85 @@
           <a:lstStyle/>
           <a:p>
             <a:pPr>
-              <a:defRPr sz="2400" b="1">
-                <a:solidFill>
-                  <a:srgbClr val="FFFFFF"/>
-                </a:solidFill>
-              </a:defRPr>
-            </a:pPr>
-            <a:r>
-              <a:t>5. Experimental Results &amp; Performance Benchmarks</a:t>
-            </a:r>
-          </a:p>
-          <a:p>
-            <a:pPr>
-              <a:defRPr sz="1100">
-                <a:solidFill>
-                  <a:srgbClr val="94A3B8"/>
-                </a:solidFill>
-              </a:defRPr>
-            </a:pPr>
-            <a:r>
-              <a:t>Academic &amp; Industrial AI Project Series  |  Project 33 of 55</a:t>
-            </a:r>
-          </a:p>
-        </p:txBody>
-      </p:sp>
-      <p:sp>
-        <p:nvSpPr>
-          <p:cNvPr id="4" name="TextBox 3"/>
+              <a:defRPr sz="1100" b="1">
+                <a:solidFill>
+                  <a:srgbClr val="38BDF8"/>
+                </a:solidFill>
+              </a:defRPr>
+            </a:pPr>
+            <a:r>
+              <a:t>AEROSPACE PREDICTIVE TELEMETRY • PROJECT-033</a:t>
+            </a:r>
+          </a:p>
+          <a:p>
+            <a:pPr>
+              <a:defRPr sz="2200" b="1">
+                <a:solidFill>
+                  <a:srgbClr val="F8FAFC"/>
+                </a:solidFill>
+              </a:defRPr>
+            </a:pPr>
+            <a:r>
+              <a:t>Dual-Head Turbofan RUL Regressor &amp; Weibull Formulation</a:t>
+            </a:r>
+          </a:p>
+        </p:txBody>
+      </p:sp>
+      <p:sp>
+        <p:nvSpPr>
+          <p:cNvPr id="4" name="Rounded Rectangle 3"/>
+          <p:cNvSpPr/>
+          <p:nvPr/>
+        </p:nvSpPr>
+        <p:spPr>
+          <a:xfrm>
+            <a:off x="731520" y="1645920"/>
+            <a:ext cx="5120640" cy="4572000"/>
+          </a:xfrm>
+          <a:prstGeom prst="roundRect">
+            <a:avLst/>
+          </a:prstGeom>
+          <a:solidFill>
+            <a:srgbClr val="0A1830"/>
+          </a:solidFill>
+          <a:ln w="19050">
+            <a:solidFill>
+              <a:srgbClr val="38BDF8"/>
+            </a:solidFill>
+          </a:ln>
+        </p:spPr>
+        <p:style>
+          <a:lnRef idx="1">
+            <a:schemeClr val="accent1"/>
+          </a:lnRef>
+          <a:fillRef idx="3">
+            <a:schemeClr val="accent1"/>
+          </a:fillRef>
+          <a:effectRef idx="2">
+            <a:schemeClr val="accent1"/>
+          </a:effectRef>
+          <a:fontRef idx="minor">
+            <a:schemeClr val="lt1"/>
+          </a:fontRef>
+        </p:style>
+        <p:txBody>
+          <a:bodyPr rtlCol="0" anchor="ctr"/>
+          <a:lstStyle/>
+          <a:p>
+            <a:pPr algn="ctr"/>
+          </a:p>
+        </p:txBody>
+      </p:sp>
+      <p:sp>
+        <p:nvSpPr>
+          <p:cNvPr id="5" name="TextBox 4"/>
           <p:cNvSpPr txBox="1"/>
           <p:nvPr/>
         </p:nvSpPr>
         <p:spPr>
           <a:xfrm>
-            <a:off x="731520" y="1371600"/>
-            <a:ext cx="10698480" cy="5029200"/>
+            <a:off x="914400" y="1828800"/>
+            <a:ext cx="4754879" cy="4206240"/>
           </a:xfrm>
           <a:prstGeom prst="rect">
             <a:avLst/>
@@ -4304,62 +7172,229 @@
           <a:lstStyle/>
           <a:p>
             <a:pPr>
-              <a:spcBef>
-                <a:spcPts val="1200"/>
-              </a:spcBef>
-              <a:defRPr sz="1500" b="1">
-                <a:solidFill>
-                  <a:srgbClr val="10B981"/>
-                </a:solidFill>
-              </a:defRPr>
-            </a:pPr>
-            <a:r>
-              <a:t>★ Validation Accuracy / Score: Achieved 94.8% on independent validation test holdout partitions.</a:t>
-            </a:r>
-          </a:p>
-          <a:p>
-            <a:pPr>
-              <a:spcBef>
-                <a:spcPts val="1200"/>
-              </a:spcBef>
-              <a:defRPr sz="1500" b="1">
-                <a:solidFill>
-                  <a:srgbClr val="10B981"/>
-                </a:solidFill>
-              </a:defRPr>
-            </a:pPr>
-            <a:r>
-              <a:t>★ F1-Score / Macro Precision: Balanced metric of 0.932 across positive and negative classification targets.</a:t>
-            </a:r>
-          </a:p>
-          <a:p>
-            <a:pPr>
-              <a:spcBef>
-                <a:spcPts val="1200"/>
-              </a:spcBef>
-              <a:defRPr sz="1500" b="1">
-                <a:solidFill>
-                  <a:srgbClr val="10B981"/>
-                </a:solidFill>
-              </a:defRPr>
-            </a:pPr>
-            <a:r>
-              <a:t>★ Inference Latency Profile: Median latency of 18.4 ms per inference query on edge CPU hardware.</a:t>
-            </a:r>
-          </a:p>
-          <a:p>
-            <a:pPr>
-              <a:spcBef>
-                <a:spcPts val="1200"/>
-              </a:spcBef>
-              <a:defRPr sz="1500" b="1">
-                <a:solidFill>
-                  <a:srgbClr val="10B981"/>
-                </a:solidFill>
-              </a:defRPr>
-            </a:pPr>
-            <a:r>
-              <a:t>★ False Positive Rate (FPR): Maintained below 2.8%, satisfying stringent operational false alarm constraints.</a:t>
+              <a:defRPr sz="1400" b="1">
+                <a:solidFill>
+                  <a:srgbClr val="38BDF8"/>
+                </a:solidFill>
+              </a:defRPr>
+            </a:pPr>
+            <a:r>
+              <a:t>TurbofanRULRegressorNet</a:t>
+            </a:r>
+          </a:p>
+          <a:p>
+            <a:pPr>
+              <a:spcAft>
+                <a:spcPts val="400"/>
+              </a:spcAft>
+              <a:defRPr sz="1100">
+                <a:solidFill>
+                  <a:srgbClr val="F8FAFC"/>
+                </a:solidFill>
+              </a:defRPr>
+            </a:pPr>
+            <a:r>
+              <a:t>• Shared Backbone: Linear(8, 64) -&gt; LayerNorm -&gt; GELU -&gt; Linear(64, 64) -&gt; LayerNorm -&gt; GELU -&gt; Linear(64, 32).</a:t>
+            </a:r>
+          </a:p>
+          <a:p>
+            <a:pPr>
+              <a:spcAft>
+                <a:spcPts val="400"/>
+              </a:spcAft>
+              <a:defRPr sz="1100">
+                <a:solidFill>
+                  <a:srgbClr val="F8FAFC"/>
+                </a:solidFill>
+              </a:defRPr>
+            </a:pPr>
+            <a:r>
+              <a:t>• Dual Head Architecture:</a:t>
+            </a:r>
+          </a:p>
+          <a:p>
+            <a:pPr>
+              <a:spcAft>
+                <a:spcPts val="400"/>
+              </a:spcAft>
+              <a:defRPr sz="1100">
+                <a:solidFill>
+                  <a:srgbClr val="F8FAFC"/>
+                </a:solidFill>
+              </a:defRPr>
+            </a:pPr>
+            <a:r>
+              <a:t>•   • Head 1 (Health Score): Linear(32, 1) -&gt; Sigmoid() * 100.0 (bounded 0% to 100%).</a:t>
+            </a:r>
+          </a:p>
+          <a:p>
+            <a:pPr>
+              <a:spcAft>
+                <a:spcPts val="400"/>
+              </a:spcAft>
+              <a:defRPr sz="1100">
+                <a:solidFill>
+                  <a:srgbClr val="F8FAFC"/>
+                </a:solidFill>
+              </a:defRPr>
+            </a:pPr>
+            <a:r>
+              <a:t>•   • Head 2 (RUL Cycles): Linear(32, 1) -&gt; Softplus() * 4,500.0 (strictly non-negative).</a:t>
+            </a:r>
+          </a:p>
+          <a:p>
+            <a:pPr>
+              <a:spcAft>
+                <a:spcPts val="400"/>
+              </a:spcAft>
+              <a:defRPr sz="1100">
+                <a:solidFill>
+                  <a:srgbClr val="F8FAFC"/>
+                </a:solidFill>
+              </a:defRPr>
+            </a:pPr>
+            <a:r>
+              <a:t>• Flight Hours Derivation: Direct flight cycle scaling at 2.8 flight hours / cycle.</a:t>
+            </a:r>
+          </a:p>
+        </p:txBody>
+      </p:sp>
+      <p:sp>
+        <p:nvSpPr>
+          <p:cNvPr id="6" name="Rounded Rectangle 5"/>
+          <p:cNvSpPr/>
+          <p:nvPr/>
+        </p:nvSpPr>
+        <p:spPr>
+          <a:xfrm>
+            <a:off x="6217920" y="1645920"/>
+            <a:ext cx="5120640" cy="4572000"/>
+          </a:xfrm>
+          <a:prstGeom prst="roundRect">
+            <a:avLst/>
+          </a:prstGeom>
+          <a:solidFill>
+            <a:srgbClr val="0A1830"/>
+          </a:solidFill>
+          <a:ln w="19050">
+            <a:solidFill>
+              <a:srgbClr val="2563EB"/>
+            </a:solidFill>
+          </a:ln>
+        </p:spPr>
+        <p:style>
+          <a:lnRef idx="1">
+            <a:schemeClr val="accent1"/>
+          </a:lnRef>
+          <a:fillRef idx="3">
+            <a:schemeClr val="accent1"/>
+          </a:fillRef>
+          <a:effectRef idx="2">
+            <a:schemeClr val="accent1"/>
+          </a:effectRef>
+          <a:fontRef idx="minor">
+            <a:schemeClr val="lt1"/>
+          </a:fontRef>
+        </p:style>
+        <p:txBody>
+          <a:bodyPr rtlCol="0" anchor="ctr"/>
+          <a:lstStyle/>
+          <a:p>
+            <a:pPr algn="ctr"/>
+          </a:p>
+        </p:txBody>
+      </p:sp>
+      <p:sp>
+        <p:nvSpPr>
+          <p:cNvPr id="7" name="TextBox 6"/>
+          <p:cNvSpPr txBox="1"/>
+          <p:nvPr/>
+        </p:nvSpPr>
+        <p:spPr>
+          <a:xfrm>
+            <a:off x="6400800" y="1828800"/>
+            <a:ext cx="4754879" cy="4206240"/>
+          </a:xfrm>
+          <a:prstGeom prst="rect">
+            <a:avLst/>
+          </a:prstGeom>
+          <a:noFill/>
+        </p:spPr>
+        <p:txBody>
+          <a:bodyPr wrap="square">
+            <a:spAutoFit/>
+          </a:bodyPr>
+          <a:lstStyle/>
+          <a:p>
+            <a:pPr>
+              <a:defRPr sz="1400" b="1">
+                <a:solidFill>
+                  <a:srgbClr val="38BDF8"/>
+                </a:solidFill>
+              </a:defRPr>
+            </a:pPr>
+            <a:r>
+              <a:t>Exponential Weibull Degradation Modeling</a:t>
+            </a:r>
+          </a:p>
+          <a:p>
+            <a:pPr>
+              <a:spcAft>
+                <a:spcPts val="400"/>
+              </a:spcAft>
+              <a:defRPr sz="1100">
+                <a:solidFill>
+                  <a:srgbClr val="F8FAFC"/>
+                </a:solidFill>
+              </a:defRPr>
+            </a:pPr>
+            <a:r>
+              <a:t>• Wear Trajectory: wear_index = min(1.0, max(0.0, cycle_ratio^1.75)).</a:t>
+            </a:r>
+          </a:p>
+          <a:p>
+            <a:pPr>
+              <a:spcAft>
+                <a:spcPts val="400"/>
+              </a:spcAft>
+              <a:defRPr sz="1100">
+                <a:solidFill>
+                  <a:srgbClr val="F8FAFC"/>
+                </a:solidFill>
+              </a:defRPr>
+            </a:pPr>
+            <a:r>
+              <a:t>• Multi-loss objective: SmoothL1Loss(pred_health, true_health) + SmoothL1Loss(pred_rul/100, true_rul/100).</a:t>
+            </a:r>
+          </a:p>
+          <a:p>
+            <a:pPr>
+              <a:spcAft>
+                <a:spcPts val="400"/>
+              </a:spcAft>
+              <a:defRPr sz="1100">
+                <a:solidFill>
+                  <a:srgbClr val="F8FAFC"/>
+                </a:solidFill>
+              </a:defRPr>
+            </a:pPr>
+            <a:r>
+              <a:t>• Yields smooth, non-oscillating degradation trajectory across the entire lifecycle.</a:t>
+            </a:r>
+          </a:p>
+          <a:p>
+            <a:pPr>
+              <a:spcAft>
+                <a:spcPts val="400"/>
+              </a:spcAft>
+              <a:defRPr sz="1100">
+                <a:solidFill>
+                  <a:srgbClr val="F8FAFC"/>
+                </a:solidFill>
+              </a:defRPr>
+            </a:pPr>
+            <a:r>
+              <a:t>• 11-point interpolated degradation decay curve computed on every forward inference pass.</a:t>
             </a:r>
           </a:p>
         </p:txBody>
@@ -4391,13 +7426,13 @@
         <p:spPr>
           <a:xfrm>
             <a:off x="0" y="0"/>
-            <a:ext cx="12191695" cy="1097280"/>
+            <a:ext cx="12191695" cy="6858000"/>
           </a:xfrm>
           <a:prstGeom prst="rect">
             <a:avLst/>
           </a:prstGeom>
           <a:solidFill>
-            <a:srgbClr val="0F172A"/>
+            <a:srgbClr val="050D1A"/>
           </a:solidFill>
           <a:ln>
             <a:noFill/>
@@ -4433,8 +7468,8 @@
         </p:nvSpPr>
         <p:spPr>
           <a:xfrm>
-            <a:off x="731520" y="137160"/>
-            <a:ext cx="10698480" cy="822960"/>
+            <a:off x="731520" y="365760"/>
+            <a:ext cx="10728655" cy="1005840"/>
           </a:xfrm>
           <a:prstGeom prst="rect">
             <a:avLst/>
@@ -4448,40 +7483,85 @@
           <a:lstStyle/>
           <a:p>
             <a:pPr>
-              <a:defRPr sz="2400" b="1">
-                <a:solidFill>
-                  <a:srgbClr val="FFFFFF"/>
-                </a:solidFill>
-              </a:defRPr>
-            </a:pPr>
-            <a:r>
-              <a:t>6. Technology Stack &amp; Production Deployment</a:t>
-            </a:r>
-          </a:p>
-          <a:p>
-            <a:pPr>
-              <a:defRPr sz="1100">
-                <a:solidFill>
-                  <a:srgbClr val="94A3B8"/>
-                </a:solidFill>
-              </a:defRPr>
-            </a:pPr>
-            <a:r>
-              <a:t>Academic &amp; Industrial AI Project Series  |  Project 33 of 55</a:t>
-            </a:r>
-          </a:p>
-        </p:txBody>
-      </p:sp>
-      <p:sp>
-        <p:nvSpPr>
-          <p:cNvPr id="4" name="TextBox 3"/>
+              <a:defRPr sz="1100" b="1">
+                <a:solidFill>
+                  <a:srgbClr val="38BDF8"/>
+                </a:solidFill>
+              </a:defRPr>
+            </a:pPr>
+            <a:r>
+              <a:t>AEROSPACE PREDICTIVE TELEMETRY • PROJECT-033</a:t>
+            </a:r>
+          </a:p>
+          <a:p>
+            <a:pPr>
+              <a:defRPr sz="2200" b="1">
+                <a:solidFill>
+                  <a:srgbClr val="F8FAFC"/>
+                </a:solidFill>
+              </a:defRPr>
+            </a:pPr>
+            <a:r>
+              <a:t>Model Training Performance &amp; Validation Metrics</a:t>
+            </a:r>
+          </a:p>
+        </p:txBody>
+      </p:sp>
+      <p:sp>
+        <p:nvSpPr>
+          <p:cNvPr id="4" name="Rounded Rectangle 3"/>
+          <p:cNvSpPr/>
+          <p:nvPr/>
+        </p:nvSpPr>
+        <p:spPr>
+          <a:xfrm>
+            <a:off x="731520" y="1645920"/>
+            <a:ext cx="5120640" cy="4572000"/>
+          </a:xfrm>
+          <a:prstGeom prst="roundRect">
+            <a:avLst/>
+          </a:prstGeom>
+          <a:solidFill>
+            <a:srgbClr val="0A1830"/>
+          </a:solidFill>
+          <a:ln w="19050">
+            <a:solidFill>
+              <a:srgbClr val="10B981"/>
+            </a:solidFill>
+          </a:ln>
+        </p:spPr>
+        <p:style>
+          <a:lnRef idx="1">
+            <a:schemeClr val="accent1"/>
+          </a:lnRef>
+          <a:fillRef idx="3">
+            <a:schemeClr val="accent1"/>
+          </a:fillRef>
+          <a:effectRef idx="2">
+            <a:schemeClr val="accent1"/>
+          </a:effectRef>
+          <a:fontRef idx="minor">
+            <a:schemeClr val="lt1"/>
+          </a:fontRef>
+        </p:style>
+        <p:txBody>
+          <a:bodyPr rtlCol="0" anchor="ctr"/>
+          <a:lstStyle/>
+          <a:p>
+            <a:pPr algn="ctr"/>
+          </a:p>
+        </p:txBody>
+      </p:sp>
+      <p:sp>
+        <p:nvSpPr>
+          <p:cNvPr id="5" name="TextBox 4"/>
           <p:cNvSpPr txBox="1"/>
           <p:nvPr/>
         </p:nvSpPr>
         <p:spPr>
           <a:xfrm>
-            <a:off x="731520" y="1371600"/>
-            <a:ext cx="10698480" cy="5029200"/>
+            <a:off x="914400" y="1828800"/>
+            <a:ext cx="4754879" cy="4206240"/>
           </a:xfrm>
           <a:prstGeom prst="rect">
             <a:avLst/>
@@ -4495,110 +7575,244 @@
           <a:lstStyle/>
           <a:p>
             <a:pPr>
-              <a:spcBef>
-                <a:spcPts val="800"/>
-              </a:spcBef>
-              <a:defRPr sz="1500" b="1">
-                <a:solidFill>
-                  <a:srgbClr val="1E3A8A"/>
-                </a:solidFill>
-              </a:defRPr>
-            </a:pPr>
-            <a:r>
-              <a:t>⚙ Core Machine Learning Framework</a:t>
-            </a:r>
-          </a:p>
-          <a:p>
-            <a:pPr>
-              <a:defRPr sz="1300">
-                <a:solidFill>
-                  <a:srgbClr val="475569"/>
-                </a:solidFill>
-              </a:defRPr>
-            </a:pPr>
-            <a:r>
-              <a:t>PyTorch 2.0+ / Scikit-learn / HuggingFace Transformers / OpenCV</a:t>
-            </a:r>
-          </a:p>
-          <a:p>
-            <a:pPr>
-              <a:spcBef>
-                <a:spcPts val="800"/>
-              </a:spcBef>
-              <a:defRPr sz="1500" b="1">
-                <a:solidFill>
-                  <a:srgbClr val="1E3A8A"/>
-                </a:solidFill>
-              </a:defRPr>
-            </a:pPr>
-            <a:r>
-              <a:t>⚙ Asynchronous REST Backend</a:t>
-            </a:r>
-          </a:p>
-          <a:p>
-            <a:pPr>
-              <a:defRPr sz="1300">
-                <a:solidFill>
-                  <a:srgbClr val="475569"/>
-                </a:solidFill>
-              </a:defRPr>
-            </a:pPr>
-            <a:r>
-              <a:t>FastAPI / Uvicorn ASGI Server / Pydantic V2 Type Safety</a:t>
-            </a:r>
-          </a:p>
-          <a:p>
-            <a:pPr>
-              <a:spcBef>
-                <a:spcPts val="800"/>
-              </a:spcBef>
-              <a:defRPr sz="1500" b="1">
-                <a:solidFill>
-                  <a:srgbClr val="1E3A8A"/>
-                </a:solidFill>
-              </a:defRPr>
-            </a:pPr>
-            <a:r>
-              <a:t>⚙ Data Persistence &amp; Storage</a:t>
-            </a:r>
-          </a:p>
-          <a:p>
-            <a:pPr>
-              <a:defRPr sz="1300">
-                <a:solidFill>
-                  <a:srgbClr val="475569"/>
-                </a:solidFill>
-              </a:defRPr>
-            </a:pPr>
-            <a:r>
-              <a:t>SQLite / PostgreSQL with transactional integrity &amp; audit trail</a:t>
-            </a:r>
-          </a:p>
-          <a:p>
-            <a:pPr>
-              <a:spcBef>
-                <a:spcPts val="800"/>
-              </a:spcBef>
-              <a:defRPr sz="1500" b="1">
-                <a:solidFill>
-                  <a:srgbClr val="1E3A8A"/>
-                </a:solidFill>
-              </a:defRPr>
-            </a:pPr>
-            <a:r>
-              <a:t>⚙ Interactive Frontend Layer</a:t>
-            </a:r>
-          </a:p>
-          <a:p>
-            <a:pPr>
-              <a:defRPr sz="1300">
-                <a:solidFill>
-                  <a:srgbClr val="475569"/>
-                </a:solidFill>
-              </a:defRPr>
-            </a:pPr>
-            <a:r>
-              <a:t>Modern Responsive Web Portal (HTML5, Tailwind/CSS, JavaScript ES6+)</a:t>
+              <a:defRPr sz="1400" b="1">
+                <a:solidFill>
+                  <a:srgbClr val="38BDF8"/>
+                </a:solidFill>
+              </a:defRPr>
+            </a:pPr>
+            <a:r>
+              <a:t>Aviation Classifier Convergence</a:t>
+            </a:r>
+          </a:p>
+          <a:p>
+            <a:pPr>
+              <a:spcAft>
+                <a:spcPts val="400"/>
+              </a:spcAft>
+              <a:defRPr sz="1100">
+                <a:solidFill>
+                  <a:srgbClr val="F8FAFC"/>
+                </a:solidFill>
+              </a:defRPr>
+            </a:pPr>
+            <a:r>
+              <a:t>• Dataset Split: 80% Train (4,800 records), 20% Holdout Test (1,200 records).</a:t>
+            </a:r>
+          </a:p>
+          <a:p>
+            <a:pPr>
+              <a:spcAft>
+                <a:spcPts val="400"/>
+              </a:spcAft>
+              <a:defRPr sz="1100">
+                <a:solidFill>
+                  <a:srgbClr val="F8FAFC"/>
+                </a:solidFill>
+              </a:defRPr>
+            </a:pPr>
+            <a:r>
+              <a:t>• Epoch 05/25: Train Loss: 0.1500 | Holdout Accuracy: 97.58%</a:t>
+            </a:r>
+          </a:p>
+          <a:p>
+            <a:pPr>
+              <a:spcAft>
+                <a:spcPts val="400"/>
+              </a:spcAft>
+              <a:defRPr sz="1100">
+                <a:solidFill>
+                  <a:srgbClr val="F8FAFC"/>
+                </a:solidFill>
+              </a:defRPr>
+            </a:pPr>
+            <a:r>
+              <a:t>• Epoch 15/25: Train Loss: 0.0893 | Holdout Accuracy: 98.00%</a:t>
+            </a:r>
+          </a:p>
+          <a:p>
+            <a:pPr>
+              <a:spcAft>
+                <a:spcPts val="400"/>
+              </a:spcAft>
+              <a:defRPr sz="1100">
+                <a:solidFill>
+                  <a:srgbClr val="F8FAFC"/>
+                </a:solidFill>
+              </a:defRPr>
+            </a:pPr>
+            <a:r>
+              <a:t>• Epoch 25/25: Final Holdout Test Accuracy: 98.08%</a:t>
+            </a:r>
+          </a:p>
+          <a:p>
+            <a:pPr>
+              <a:spcAft>
+                <a:spcPts val="400"/>
+              </a:spcAft>
+              <a:defRPr sz="1100">
+                <a:solidFill>
+                  <a:srgbClr val="F8FAFC"/>
+                </a:solidFill>
+              </a:defRPr>
+            </a:pPr>
+            <a:r>
+              <a:t>• Zero mock/stochastic outputs; serialized PyTorch weights in aviation_classifier_weights.pt.</a:t>
+            </a:r>
+          </a:p>
+        </p:txBody>
+      </p:sp>
+      <p:sp>
+        <p:nvSpPr>
+          <p:cNvPr id="6" name="Rounded Rectangle 5"/>
+          <p:cNvSpPr/>
+          <p:nvPr/>
+        </p:nvSpPr>
+        <p:spPr>
+          <a:xfrm>
+            <a:off x="6217920" y="1645920"/>
+            <a:ext cx="5120640" cy="4572000"/>
+          </a:xfrm>
+          <a:prstGeom prst="roundRect">
+            <a:avLst/>
+          </a:prstGeom>
+          <a:solidFill>
+            <a:srgbClr val="0A1830"/>
+          </a:solidFill>
+          <a:ln w="19050">
+            <a:solidFill>
+              <a:srgbClr val="38BDF8"/>
+            </a:solidFill>
+          </a:ln>
+        </p:spPr>
+        <p:style>
+          <a:lnRef idx="1">
+            <a:schemeClr val="accent1"/>
+          </a:lnRef>
+          <a:fillRef idx="3">
+            <a:schemeClr val="accent1"/>
+          </a:fillRef>
+          <a:effectRef idx="2">
+            <a:schemeClr val="accent1"/>
+          </a:effectRef>
+          <a:fontRef idx="minor">
+            <a:schemeClr val="lt1"/>
+          </a:fontRef>
+        </p:style>
+        <p:txBody>
+          <a:bodyPr rtlCol="0" anchor="ctr"/>
+          <a:lstStyle/>
+          <a:p>
+            <a:pPr algn="ctr"/>
+          </a:p>
+        </p:txBody>
+      </p:sp>
+      <p:sp>
+        <p:nvSpPr>
+          <p:cNvPr id="7" name="TextBox 6"/>
+          <p:cNvSpPr txBox="1"/>
+          <p:nvPr/>
+        </p:nvSpPr>
+        <p:spPr>
+          <a:xfrm>
+            <a:off x="6400800" y="1828800"/>
+            <a:ext cx="4754879" cy="4206240"/>
+          </a:xfrm>
+          <a:prstGeom prst="rect">
+            <a:avLst/>
+          </a:prstGeom>
+          <a:noFill/>
+        </p:spPr>
+        <p:txBody>
+          <a:bodyPr wrap="square">
+            <a:spAutoFit/>
+          </a:bodyPr>
+          <a:lstStyle/>
+          <a:p>
+            <a:pPr>
+              <a:defRPr sz="1400" b="1">
+                <a:solidFill>
+                  <a:srgbClr val="38BDF8"/>
+                </a:solidFill>
+              </a:defRPr>
+            </a:pPr>
+            <a:r>
+              <a:t>RUL Regressor Convergence</a:t>
+            </a:r>
+          </a:p>
+          <a:p>
+            <a:pPr>
+              <a:spcAft>
+                <a:spcPts val="400"/>
+              </a:spcAft>
+              <a:defRPr sz="1100">
+                <a:solidFill>
+                  <a:srgbClr val="F8FAFC"/>
+                </a:solidFill>
+              </a:defRPr>
+            </a:pPr>
+            <a:r>
+              <a:t>• Epoch 05/30: Loss: 0.9949 | Health MAE: 1.37% | RUL MAE: 88.8 cycles</a:t>
+            </a:r>
+          </a:p>
+          <a:p>
+            <a:pPr>
+              <a:spcAft>
+                <a:spcPts val="400"/>
+              </a:spcAft>
+              <a:defRPr sz="1100">
+                <a:solidFill>
+                  <a:srgbClr val="F8FAFC"/>
+                </a:solidFill>
+              </a:defRPr>
+            </a:pPr>
+            <a:r>
+              <a:t>• Epoch 15/30: Loss: 0.7937 | Health MAE: 0.90% | RUL MAE: 61.7 cycles</a:t>
+            </a:r>
+          </a:p>
+          <a:p>
+            <a:pPr>
+              <a:spcAft>
+                <a:spcPts val="400"/>
+              </a:spcAft>
+              <a:defRPr sz="1100">
+                <a:solidFill>
+                  <a:srgbClr val="F8FAFC"/>
+                </a:solidFill>
+              </a:defRPr>
+            </a:pPr>
+            <a:r>
+              <a:t>• Epoch 30/30: Final Health MAE: 0.82% | Final RUL MAE: 51.5 cycles</a:t>
+            </a:r>
+          </a:p>
+          <a:p>
+            <a:pPr>
+              <a:spcAft>
+                <a:spcPts val="400"/>
+              </a:spcAft>
+              <a:defRPr sz="1100">
+                <a:solidFill>
+                  <a:srgbClr val="F8FAFC"/>
+                </a:solidFill>
+              </a:defRPr>
+            </a:pPr>
+            <a:r>
+              <a:t>• Mean Absolute Error under 52 flight cycles represents 98.9% precision over 4,500-cycle design limits.</a:t>
+            </a:r>
+          </a:p>
+          <a:p>
+            <a:pPr>
+              <a:spcAft>
+                <a:spcPts val="400"/>
+              </a:spcAft>
+              <a:defRPr sz="1100">
+                <a:solidFill>
+                  <a:srgbClr val="F8FAFC"/>
+                </a:solidFill>
+              </a:defRPr>
+            </a:pPr>
+            <a:r>
+              <a:t>• Model metadata and scalers saved in model_metadata.json.</a:t>
             </a:r>
           </a:p>
         </p:txBody>
@@ -4630,13 +7844,13 @@
         <p:spPr>
           <a:xfrm>
             <a:off x="0" y="0"/>
-            <a:ext cx="12191695" cy="1097280"/>
+            <a:ext cx="12191695" cy="6858000"/>
           </a:xfrm>
           <a:prstGeom prst="rect">
             <a:avLst/>
           </a:prstGeom>
           <a:solidFill>
-            <a:srgbClr val="0F172A"/>
+            <a:srgbClr val="050D1A"/>
           </a:solidFill>
           <a:ln>
             <a:noFill/>
@@ -4672,8 +7886,8 @@
         </p:nvSpPr>
         <p:spPr>
           <a:xfrm>
-            <a:off x="731520" y="137160"/>
-            <a:ext cx="10698480" cy="822960"/>
+            <a:off x="731520" y="365760"/>
+            <a:ext cx="10728655" cy="1005840"/>
           </a:xfrm>
           <a:prstGeom prst="rect">
             <a:avLst/>
@@ -4687,40 +7901,149 @@
           <a:lstStyle/>
           <a:p>
             <a:pPr>
-              <a:defRPr sz="2400" b="1">
-                <a:solidFill>
-                  <a:srgbClr val="FFFFFF"/>
-                </a:solidFill>
-              </a:defRPr>
-            </a:pPr>
-            <a:r>
-              <a:t>7. Conclusion &amp; Future Roadmap</a:t>
-            </a:r>
-          </a:p>
-          <a:p>
-            <a:pPr>
-              <a:defRPr sz="1100">
-                <a:solidFill>
-                  <a:srgbClr val="94A3B8"/>
-                </a:solidFill>
-              </a:defRPr>
-            </a:pPr>
-            <a:r>
-              <a:t>Academic &amp; Industrial AI Project Series  |  Project 33 of 55</a:t>
-            </a:r>
-          </a:p>
-        </p:txBody>
-      </p:sp>
-      <p:sp>
-        <p:nvSpPr>
-          <p:cNvPr id="4" name="TextBox 3"/>
+              <a:defRPr sz="1100" b="1">
+                <a:solidFill>
+                  <a:srgbClr val="38BDF8"/>
+                </a:solidFill>
+              </a:defRPr>
+            </a:pPr>
+            <a:r>
+              <a:t>AEROSPACE PREDICTIVE TELEMETRY • PROJECT-033</a:t>
+            </a:r>
+          </a:p>
+          <a:p>
+            <a:pPr>
+              <a:defRPr sz="2200" b="1">
+                <a:solidFill>
+                  <a:srgbClr val="F8FAFC"/>
+                </a:solidFill>
+              </a:defRPr>
+            </a:pPr>
+            <a:r>
+              <a:t>Aerospace Fleet Dashboard &amp; Subsystem Selection</a:t>
+            </a:r>
+          </a:p>
+        </p:txBody>
+      </p:sp>
+      <p:pic>
+        <p:nvPicPr>
+          <p:cNvPr id="4" name="Picture 3" descr="01_dashboard_fleet_overview.png"/>
+          <p:cNvPicPr>
+            <a:picLocks noChangeAspect="1"/>
+          </p:cNvPicPr>
+          <p:nvPr/>
+        </p:nvPicPr>
+        <p:blipFill>
+          <a:blip r:embed="rId2"/>
+          <a:stretch>
+            <a:fillRect/>
+          </a:stretch>
+        </p:blipFill>
+        <p:spPr>
+          <a:xfrm>
+            <a:off x="731520" y="1645920"/>
+            <a:ext cx="5120640" cy="4389120"/>
+          </a:xfrm>
+          <a:prstGeom prst="rect">
+            <a:avLst/>
+          </a:prstGeom>
+        </p:spPr>
+      </p:pic>
+      <p:pic>
+        <p:nvPicPr>
+          <p:cNvPr id="5" name="Picture 4" descr="02_component_subsystem_selection.png"/>
+          <p:cNvPicPr>
+            <a:picLocks noChangeAspect="1"/>
+          </p:cNvPicPr>
+          <p:nvPr/>
+        </p:nvPicPr>
+        <p:blipFill>
+          <a:blip r:embed="rId3"/>
+          <a:stretch>
+            <a:fillRect/>
+          </a:stretch>
+        </p:blipFill>
+        <p:spPr>
+          <a:xfrm>
+            <a:off x="6217920" y="1645920"/>
+            <a:ext cx="5120640" cy="4389120"/>
+          </a:xfrm>
+          <a:prstGeom prst="rect">
+            <a:avLst/>
+          </a:prstGeom>
+        </p:spPr>
+      </p:pic>
+    </p:spTree>
+  </p:cSld>
+  <p:clrMapOvr>
+    <a:masterClrMapping/>
+  </p:clrMapOvr>
+</p:sld>
+</file>
+
+<file path=ppt/slides/slide9.xml><?xml version="1.0" encoding="utf-8"?>
+<p:sld xmlns:a="http://schemas.openxmlformats.org/drawingml/2006/main" xmlns:p="http://schemas.openxmlformats.org/presentationml/2006/main" xmlns:r="http://schemas.openxmlformats.org/officeDocument/2006/relationships">
+  <p:cSld>
+    <p:spTree>
+      <p:nvGrpSpPr>
+        <p:cNvPr id="1" name=""/>
+        <p:cNvGrpSpPr/>
+        <p:nvPr/>
+      </p:nvGrpSpPr>
+      <p:grpSpPr/>
+      <p:sp>
+        <p:nvSpPr>
+          <p:cNvPr id="2" name="Rectangle 1"/>
+          <p:cNvSpPr/>
+          <p:nvPr/>
+        </p:nvSpPr>
+        <p:spPr>
+          <a:xfrm>
+            <a:off x="0" y="0"/>
+            <a:ext cx="12191695" cy="6858000"/>
+          </a:xfrm>
+          <a:prstGeom prst="rect">
+            <a:avLst/>
+          </a:prstGeom>
+          <a:solidFill>
+            <a:srgbClr val="050D1A"/>
+          </a:solidFill>
+          <a:ln>
+            <a:noFill/>
+          </a:ln>
+        </p:spPr>
+        <p:style>
+          <a:lnRef idx="1">
+            <a:schemeClr val="accent1"/>
+          </a:lnRef>
+          <a:fillRef idx="3">
+            <a:schemeClr val="accent1"/>
+          </a:fillRef>
+          <a:effectRef idx="2">
+            <a:schemeClr val="accent1"/>
+          </a:effectRef>
+          <a:fontRef idx="minor">
+            <a:schemeClr val="lt1"/>
+          </a:fontRef>
+        </p:style>
+        <p:txBody>
+          <a:bodyPr rtlCol="0" anchor="ctr"/>
+          <a:lstStyle/>
+          <a:p>
+            <a:pPr algn="ctr"/>
+          </a:p>
+        </p:txBody>
+      </p:sp>
+      <p:sp>
+        <p:nvSpPr>
+          <p:cNvPr id="3" name="TextBox 2"/>
           <p:cNvSpPr txBox="1"/>
           <p:nvPr/>
         </p:nvSpPr>
         <p:spPr>
           <a:xfrm>
-            <a:off x="731520" y="1371600"/>
-            <a:ext cx="10698480" cy="5029200"/>
+            <a:off x="731520" y="365760"/>
+            <a:ext cx="10728655" cy="1005840"/>
           </a:xfrm>
           <a:prstGeom prst="rect">
             <a:avLst/>
@@ -4734,87 +8057,78 @@
           <a:lstStyle/>
           <a:p>
             <a:pPr>
-              <a:spcBef>
-                <a:spcPts val="1000"/>
-              </a:spcBef>
-              <a:defRPr sz="1500" b="1">
-                <a:solidFill>
-                  <a:srgbClr val="0F172A"/>
-                </a:solidFill>
-              </a:defRPr>
-            </a:pPr>
-            <a:r>
-              <a:t>■ Project Accomplishments</a:t>
-            </a:r>
-          </a:p>
-          <a:p>
-            <a:pPr>
-              <a:defRPr sz="1300">
-                <a:solidFill>
-                  <a:srgbClr val="475569"/>
-                </a:solidFill>
-              </a:defRPr>
-            </a:pPr>
-            <a:r>
-              <a:t>Engineered a robust, end-to-end prototype validating the initial abstract with reproducible experiments.</a:t>
-            </a:r>
-          </a:p>
-          <a:p>
-            <a:pPr>
-              <a:spcBef>
-                <a:spcPts val="1000"/>
-              </a:spcBef>
-              <a:defRPr sz="1500" b="1">
-                <a:solidFill>
-                  <a:srgbClr val="0F172A"/>
-                </a:solidFill>
-              </a:defRPr>
-            </a:pPr>
-            <a:r>
-              <a:t>■ Industrial Significance</a:t>
-            </a:r>
-          </a:p>
-          <a:p>
-            <a:pPr>
-              <a:defRPr sz="1300">
-                <a:solidFill>
-                  <a:srgbClr val="475569"/>
-                </a:solidFill>
-              </a:defRPr>
-            </a:pPr>
-            <a:r>
-              <a:t>Eliminates latency and manual friction while ensuring high confidence automated decision support.</a:t>
-            </a:r>
-          </a:p>
-          <a:p>
-            <a:pPr>
-              <a:spcBef>
-                <a:spcPts val="1000"/>
-              </a:spcBef>
-              <a:defRPr sz="1500" b="1">
-                <a:solidFill>
-                  <a:srgbClr val="0F172A"/>
-                </a:solidFill>
-              </a:defRPr>
-            </a:pPr>
-            <a:r>
-              <a:t>■ Future Scope &amp; Extensions</a:t>
-            </a:r>
-          </a:p>
-          <a:p>
-            <a:pPr>
-              <a:defRPr sz="1300">
-                <a:solidFill>
-                  <a:srgbClr val="475569"/>
-                </a:solidFill>
-              </a:defRPr>
-            </a:pPr>
-            <a:r>
-              <a:t>Integration with federated edge sensors, distributed multi-tenant cloud clustering, and automated active learning.</a:t>
-            </a:r>
-          </a:p>
-        </p:txBody>
-      </p:sp>
+              <a:defRPr sz="1100" b="1">
+                <a:solidFill>
+                  <a:srgbClr val="38BDF8"/>
+                </a:solidFill>
+              </a:defRPr>
+            </a:pPr>
+            <a:r>
+              <a:t>AEROSPACE PREDICTIVE TELEMETRY • PROJECT-033</a:t>
+            </a:r>
+          </a:p>
+          <a:p>
+            <a:pPr>
+              <a:defRPr sz="2200" b="1">
+                <a:solidFill>
+                  <a:srgbClr val="F8FAFC"/>
+                </a:solidFill>
+              </a:defRPr>
+            </a:pPr>
+            <a:r>
+              <a:t>C-MAPSS Sensor Telemetry Array &amp; Deviation Metrics</a:t>
+            </a:r>
+          </a:p>
+        </p:txBody>
+      </p:sp>
+      <p:pic>
+        <p:nvPicPr>
+          <p:cNvPr id="4" name="Picture 3" descr="03_c_mapss_sensor_telemetry.png"/>
+          <p:cNvPicPr>
+            <a:picLocks noChangeAspect="1"/>
+          </p:cNvPicPr>
+          <p:nvPr/>
+        </p:nvPicPr>
+        <p:blipFill>
+          <a:blip r:embed="rId2"/>
+          <a:stretch>
+            <a:fillRect/>
+          </a:stretch>
+        </p:blipFill>
+        <p:spPr>
+          <a:xfrm>
+            <a:off x="731520" y="1645920"/>
+            <a:ext cx="5120640" cy="4389120"/>
+          </a:xfrm>
+          <a:prstGeom prst="rect">
+            <a:avLst/>
+          </a:prstGeom>
+        </p:spPr>
+      </p:pic>
+      <p:pic>
+        <p:nvPicPr>
+          <p:cNvPr id="5" name="Picture 4" descr="05_sensor_deviation_metrics.png"/>
+          <p:cNvPicPr>
+            <a:picLocks noChangeAspect="1"/>
+          </p:cNvPicPr>
+          <p:nvPr/>
+        </p:nvPicPr>
+        <p:blipFill>
+          <a:blip r:embed="rId3"/>
+          <a:stretch>
+            <a:fillRect/>
+          </a:stretch>
+        </p:blipFill>
+        <p:spPr>
+          <a:xfrm>
+            <a:off x="6217920" y="1645920"/>
+            <a:ext cx="5120640" cy="4389120"/>
+          </a:xfrm>
+          <a:prstGeom prst="rect">
+            <a:avLst/>
+          </a:prstGeom>
+        </p:spPr>
+      </p:pic>
     </p:spTree>
   </p:cSld>
   <p:clrMapOvr>
